--- a/modulo-01/01.05 - Trabalhando com Objetos de Dados Estruturados/01.05_Trabalhando_com_dados_estruturados.pptx
+++ b/modulo-01/01.05 - Trabalhando com Objetos de Dados Estruturados/01.05_Trabalhando_com_dados_estruturados.pptx
@@ -2919,7 +2919,7 @@
                   <a:srgbClr val="FFFFFF"/>
                 </a:solidFill>
               </a:rPr>
-              <a:t>zcl_05_corresponding.clas.abap</a:t>
+              <a:t>zcl_pc_endereco_demo.clas.abap</a:t>
             </a:r>
             <a:endParaRPr lang="en-US" sz="950" dirty="0"/>
           </a:p>
@@ -2955,7 +2955,7 @@
                   <a:srgbClr val="9DA5B4"/>
                 </a:solidFill>
               </a:rPr>
-              <a:t>ZS4D400_## › ZCL_05_CORRESPONDING › main</a:t>
+              <a:t>Exemplo sobre ZAVBS_PC_CLIENTES › main</a:t>
             </a:r>
             <a:endParaRPr lang="en-US" sz="850" dirty="0"/>
           </a:p>
@@ -3259,7 +3259,7 @@
                 <a:ea typeface="Courier New" pitchFamily="34" charset="-122"/>
                 <a:cs typeface="Courier New" pitchFamily="34" charset="-120"/>
               </a:rPr>
-              <a:t>connection_nested</a:t>
+              <a:t>resultado-endereco</a:t>
             </a:r>
             <a:r>
               <a:rPr lang="en-US" sz="1050" dirty="0">
@@ -3358,7 +3358,7 @@
                 <a:ea typeface="Courier New" pitchFamily="34" charset="-122"/>
                 <a:cs typeface="Courier New" pitchFamily="34" charset="-120"/>
               </a:rPr>
-              <a:t>connection</a:t>
+              <a:t>endereco</a:t>
             </a:r>
             <a:r>
               <a:rPr lang="en-US" sz="1050" dirty="0">
@@ -3473,7 +3473,7 @@
                 <a:ea typeface="Courier New" pitchFamily="34" charset="-122"/>
                 <a:cs typeface="Courier New" pitchFamily="34" charset="-120"/>
               </a:rPr>
-              <a:t>target</a:t>
+              <a:t>gravar</a:t>
             </a:r>
             <a:r>
               <a:rPr lang="en-US" sz="1050" dirty="0">
@@ -3550,7 +3550,7 @@
                 <a:ea typeface="Courier New" pitchFamily="34" charset="-122"/>
                 <a:cs typeface="Courier New" pitchFamily="34" charset="-120"/>
               </a:rPr>
-              <a:t>st_target</a:t>
+              <a:t>zta_pc_endereco</a:t>
             </a:r>
             <a:r>
               <a:rPr lang="en-US" sz="1050" dirty="0">
@@ -3583,7 +3583,7 @@
                 <a:ea typeface="Courier New" pitchFamily="34" charset="-122"/>
                 <a:cs typeface="Courier New" pitchFamily="34" charset="-120"/>
               </a:rPr>
-              <a:t>connection</a:t>
+              <a:t>endereco</a:t>
             </a:r>
             <a:endParaRPr lang="en-US" sz="1050" dirty="0"/>
           </a:p>
@@ -3636,7 +3636,7 @@
                 <a:ea typeface="Courier New" pitchFamily="34" charset="-122"/>
                 <a:cs typeface="Courier New" pitchFamily="34" charset="-120"/>
               </a:rPr>
-              <a:t>destination</a:t>
+              <a:t>cidade</a:t>
             </a:r>
             <a:r>
               <a:rPr lang="en-US" sz="1050" dirty="0">
@@ -3680,7 +3680,7 @@
                 <a:ea typeface="Courier New" pitchFamily="34" charset="-122"/>
                 <a:cs typeface="Courier New" pitchFamily="34" charset="-120"/>
               </a:rPr>
-              <a:t>airport_to_id</a:t>
+              <a:t>localidade</a:t>
             </a:r>
             <a:endParaRPr lang="en-US" sz="1050" dirty="0"/>
           </a:p>
@@ -3733,7 +3733,7 @@
                 <a:ea typeface="Courier New" pitchFamily="34" charset="-122"/>
                 <a:cs typeface="Courier New" pitchFamily="34" charset="-120"/>
               </a:rPr>
-              <a:t>carrier_name</a:t>
+              <a:t>complemento</a:t>
             </a:r>
             <a:r>
               <a:rPr lang="en-US" sz="1050" dirty="0">
@@ -3826,7 +3826,7 @@
                 <a:ea typeface="Courier New" pitchFamily="34" charset="-122"/>
                 <a:cs typeface="Courier New" pitchFamily="34" charset="-120"/>
               </a:rPr>
-              <a:t>connection_nested</a:t>
+              <a:t>linha</a:t>
             </a:r>
             <a:r>
               <a:rPr lang="en-US" sz="1050" dirty="0">
@@ -3923,7 +3923,7 @@
                 <a:ea typeface="Courier New" pitchFamily="34" charset="-122"/>
                 <a:cs typeface="Courier New" pitchFamily="34" charset="-120"/>
               </a:rPr>
-              <a:t>                      </a:t>
+              <a:t>          </a:t>
             </a:r>
             <a:r>
               <a:rPr lang="en-US" sz="1050" dirty="0">
@@ -3978,7 +3978,7 @@
                 <a:ea typeface="Courier New" pitchFamily="34" charset="-122"/>
                 <a:cs typeface="Courier New" pitchFamily="34" charset="-120"/>
               </a:rPr>
-              <a:t>connection_nested</a:t>
+              <a:t>linha</a:t>
             </a:r>
             <a:r>
               <a:rPr lang="en-US" sz="1050" dirty="0">
@@ -4022,7 +4022,7 @@
                 <a:ea typeface="Courier New" pitchFamily="34" charset="-122"/>
                 <a:cs typeface="Courier New" pitchFamily="34" charset="-120"/>
               </a:rPr>
-              <a:t>connection</a:t>
+              <a:t>endereco</a:t>
             </a:r>
             <a:r>
               <a:rPr lang="en-US" sz="1050" dirty="0">
@@ -4198,7 +4198,45 @@
                   <a:srgbClr val="556B82"/>
                 </a:solidFill>
               </a:rPr>
-              <a:t>Só componentes com nomes iguais recebem valores.</a:t>
+              <a:t>Só componentes com nomes iguais recebem valores; </a:t>
+            </a:r>
+            <a:r>
+              <a:rPr lang="en-US" sz="1050" dirty="0">
+                <a:solidFill>
+                  <a:srgbClr val="0064D9"/>
+                </a:solidFill>
+                <a:latin typeface="Courier New" pitchFamily="34" charset="0"/>
+                <a:ea typeface="Courier New" pitchFamily="34" charset="-122"/>
+                <a:cs typeface="Courier New" pitchFamily="34" charset="-120"/>
+              </a:rPr>
+              <a:t>Cep</a:t>
+            </a:r>
+            <a:r>
+              <a:rPr lang="en-US" sz="1050" dirty="0">
+                <a:solidFill>
+                  <a:srgbClr val="556B82"/>
+                </a:solidFill>
+              </a:rPr>
+              <a:t> e </a:t>
+            </a:r>
+            <a:r>
+              <a:rPr lang="en-US" sz="1050" dirty="0">
+                <a:solidFill>
+                  <a:srgbClr val="0064D9"/>
+                </a:solidFill>
+                <a:latin typeface="Courier New" pitchFamily="34" charset="0"/>
+                <a:ea typeface="Courier New" pitchFamily="34" charset="-122"/>
+                <a:cs typeface="Courier New" pitchFamily="34" charset="-120"/>
+              </a:rPr>
+              <a:t>cep</a:t>
+            </a:r>
+            <a:r>
+              <a:rPr lang="en-US" sz="1050" dirty="0">
+                <a:solidFill>
+                  <a:srgbClr val="556B82"/>
+                </a:solidFill>
+              </a:rPr>
+              <a:t> contam como iguais.</a:t>
             </a:r>
             <a:endParaRPr lang="en-US" sz="1400" dirty="0"/>
           </a:p>
@@ -4310,7 +4348,45 @@
                   <a:srgbClr val="556B82"/>
                 </a:solidFill>
               </a:rPr>
-              <a:t>Liga um componente do destino a outro nome na origem.</a:t>
+              <a:t>Liga </a:t>
+            </a:r>
+            <a:r>
+              <a:rPr lang="en-US" sz="1050" dirty="0">
+                <a:solidFill>
+                  <a:srgbClr val="0064D9"/>
+                </a:solidFill>
+                <a:latin typeface="Courier New" pitchFamily="34" charset="0"/>
+                <a:ea typeface="Courier New" pitchFamily="34" charset="-122"/>
+                <a:cs typeface="Courier New" pitchFamily="34" charset="-120"/>
+              </a:rPr>
+              <a:t>cidade</a:t>
+            </a:r>
+            <a:r>
+              <a:rPr lang="en-US" sz="1050" dirty="0">
+                <a:solidFill>
+                  <a:srgbClr val="556B82"/>
+                </a:solidFill>
+              </a:rPr>
+              <a:t> da tabela à </a:t>
+            </a:r>
+            <a:r>
+              <a:rPr lang="en-US" sz="1050" dirty="0">
+                <a:solidFill>
+                  <a:srgbClr val="0064D9"/>
+                </a:solidFill>
+                <a:latin typeface="Courier New" pitchFamily="34" charset="0"/>
+                <a:ea typeface="Courier New" pitchFamily="34" charset="-122"/>
+                <a:cs typeface="Courier New" pitchFamily="34" charset="-120"/>
+              </a:rPr>
+              <a:t>localidade</a:t>
+            </a:r>
+            <a:r>
+              <a:rPr lang="en-US" sz="1050" dirty="0">
+                <a:solidFill>
+                  <a:srgbClr val="556B82"/>
+                </a:solidFill>
+              </a:rPr>
+              <a:t> que o ViaCEP devolve.</a:t>
             </a:r>
             <a:endParaRPr lang="en-US" sz="1400" dirty="0"/>
           </a:p>
@@ -5220,12 +5296,12 @@
         </p:nvSpPr>
         <p:spPr>
           <a:xfrm>
-            <a:off x="548640" y="2252345"/>
-            <a:ext cx="3545738" cy="2563622"/>
+            <a:off x="548640" y="2145030"/>
+            <a:ext cx="3545738" cy="2778252"/>
           </a:xfrm>
           <a:prstGeom prst="roundRect">
             <a:avLst>
-              <a:gd name="adj" fmla="val 3567"/>
+              <a:gd name="adj" fmla="val 3291"/>
             </a:avLst>
           </a:prstGeom>
           <a:solidFill>
@@ -5254,7 +5330,7 @@
         </p:nvSpPr>
         <p:spPr>
           <a:xfrm>
-            <a:off x="749808" y="2453513"/>
+            <a:off x="749808" y="2346198"/>
             <a:ext cx="457200" cy="457200"/>
           </a:xfrm>
           <a:prstGeom prst="roundRect">
@@ -5276,8 +5352,8 @@
         </p:nvSpPr>
         <p:spPr>
           <a:xfrm>
-            <a:off x="749808" y="3057017"/>
-            <a:ext cx="3143402" cy="1649222"/>
+            <a:off x="749808" y="2949702"/>
+            <a:ext cx="3143402" cy="1863852"/>
           </a:xfrm>
           <a:prstGeom prst="rect">
             <a:avLst/>
@@ -5443,12 +5519,12 @@
         </p:nvSpPr>
         <p:spPr>
           <a:xfrm>
-            <a:off x="4322978" y="2252345"/>
-            <a:ext cx="3545738" cy="2563622"/>
+            <a:off x="4322978" y="2145030"/>
+            <a:ext cx="3545738" cy="2778252"/>
           </a:xfrm>
           <a:prstGeom prst="roundRect">
             <a:avLst>
-              <a:gd name="adj" fmla="val 3567"/>
+              <a:gd name="adj" fmla="val 3291"/>
             </a:avLst>
           </a:prstGeom>
           <a:solidFill>
@@ -5477,7 +5553,7 @@
         </p:nvSpPr>
         <p:spPr>
           <a:xfrm>
-            <a:off x="4524146" y="2453513"/>
+            <a:off x="4524146" y="2346198"/>
             <a:ext cx="457200" cy="457200"/>
           </a:xfrm>
           <a:prstGeom prst="roundRect">
@@ -5499,8 +5575,8 @@
         </p:nvSpPr>
         <p:spPr>
           <a:xfrm>
-            <a:off x="4524146" y="3057017"/>
-            <a:ext cx="3143402" cy="1649222"/>
+            <a:off x="4524146" y="2949702"/>
+            <a:ext cx="3143402" cy="1863852"/>
           </a:xfrm>
           <a:prstGeom prst="rect">
             <a:avLst/>
@@ -5549,7 +5625,7 @@
                 <a:ea typeface="Courier New" pitchFamily="34" charset="-122"/>
                 <a:cs typeface="Courier New" pitchFamily="34" charset="-120"/>
               </a:rPr>
-              <a:t>connection-message-msgty</a:t>
+              <a:t>resultado-endereco-localidade</a:t>
             </a:r>
             <a:r>
               <a:rPr lang="en-US" sz="1300" dirty="0">
@@ -5571,12 +5647,12 @@
         </p:nvSpPr>
         <p:spPr>
           <a:xfrm>
-            <a:off x="8097317" y="2252345"/>
-            <a:ext cx="3545738" cy="2563622"/>
+            <a:off x="8097317" y="2145030"/>
+            <a:ext cx="3545738" cy="2778252"/>
           </a:xfrm>
           <a:prstGeom prst="roundRect">
             <a:avLst>
-              <a:gd name="adj" fmla="val 3567"/>
+              <a:gd name="adj" fmla="val 3291"/>
             </a:avLst>
           </a:prstGeom>
           <a:solidFill>
@@ -5605,7 +5681,7 @@
         </p:nvSpPr>
         <p:spPr>
           <a:xfrm>
-            <a:off x="8298485" y="2453513"/>
+            <a:off x="8298485" y="2346198"/>
             <a:ext cx="457200" cy="457200"/>
           </a:xfrm>
           <a:prstGeom prst="roundRect">
@@ -5627,8 +5703,8 @@
         </p:nvSpPr>
         <p:spPr>
           <a:xfrm>
-            <a:off x="8298485" y="3057017"/>
-            <a:ext cx="3143402" cy="1649222"/>
+            <a:off x="8298485" y="2949702"/>
+            <a:ext cx="3143402" cy="1863852"/>
           </a:xfrm>
           <a:prstGeom prst="rect">
             <a:avLst/>
@@ -5685,7 +5761,45 @@
                   <a:srgbClr val="556B82"/>
                 </a:solidFill>
               </a:rPr>
-              <a:t>, tabela interna ou referência: esses componentes guardam o conteúdo em outra área de memória, e a estrutura não pode ser tratada como um bloco único de caracteres.</a:t>
+              <a:t>, tabela interna ou referência: esses componentes guardam o conteúdo em outra área de memória, e a estrutura não pode ser tratada como um bloco único de caracteres. Ex.: </a:t>
+            </a:r>
+            <a:r>
+              <a:rPr lang="en-US" sz="1300" dirty="0">
+                <a:solidFill>
+                  <a:srgbClr val="0064D9"/>
+                </a:solidFill>
+                <a:latin typeface="Courier New" pitchFamily="34" charset="0"/>
+                <a:ea typeface="Courier New" pitchFamily="34" charset="-122"/>
+                <a:cs typeface="Courier New" pitchFamily="34" charset="-120"/>
+              </a:rPr>
+              <a:t>ty_endereco</a:t>
+            </a:r>
+            <a:r>
+              <a:rPr lang="en-US" sz="1300" dirty="0">
+                <a:solidFill>
+                  <a:srgbClr val="556B82"/>
+                </a:solidFill>
+              </a:rPr>
+              <a:t>, só de </a:t>
+            </a:r>
+            <a:r>
+              <a:rPr lang="en-US" sz="1300" dirty="0">
+                <a:solidFill>
+                  <a:srgbClr val="0064D9"/>
+                </a:solidFill>
+                <a:latin typeface="Courier New" pitchFamily="34" charset="0"/>
+                <a:ea typeface="Courier New" pitchFamily="34" charset="-122"/>
+                <a:cs typeface="Courier New" pitchFamily="34" charset="-120"/>
+              </a:rPr>
+              <a:t>string</a:t>
+            </a:r>
+            <a:r>
+              <a:rPr lang="en-US" sz="1300" dirty="0">
+                <a:solidFill>
+                  <a:srgbClr val="556B82"/>
+                </a:solidFill>
+              </a:rPr>
+              <a:t>.</a:t>
             </a:r>
             <a:endParaRPr lang="en-US" sz="1400" dirty="0"/>
           </a:p>
@@ -5699,7 +5813,7 @@
         </p:nvSpPr>
         <p:spPr>
           <a:xfrm>
-            <a:off x="548640" y="4998847"/>
+            <a:off x="548640" y="5106162"/>
             <a:ext cx="11094415" cy="566928"/>
           </a:xfrm>
           <a:prstGeom prst="roundRect">
@@ -5721,7 +5835,7 @@
         </p:nvSpPr>
         <p:spPr>
           <a:xfrm>
-            <a:off x="1207008" y="4998847"/>
+            <a:off x="1207008" y="5106162"/>
             <a:ext cx="10225735" cy="566928"/>
           </a:xfrm>
           <a:prstGeom prst="rect">
@@ -5822,7 +5936,7 @@
         </p:blipFill>
         <p:spPr>
           <a:xfrm>
-            <a:off x="850392" y="2554097"/>
+            <a:off x="4624730" y="2446782"/>
             <a:ext cx="256032" cy="256032"/>
           </a:xfrm>
           <a:prstGeom prst="rect">
@@ -5846,7 +5960,7 @@
         </p:blipFill>
         <p:spPr>
           <a:xfrm>
-            <a:off x="4624730" y="2554097"/>
+            <a:off x="850392" y="2446782"/>
             <a:ext cx="256032" cy="256032"/>
           </a:xfrm>
           <a:prstGeom prst="rect">
@@ -5870,8 +5984,8 @@
         </p:blipFill>
         <p:spPr>
           <a:xfrm>
-            <a:off x="8399069" y="2554097"/>
-            <a:ext cx="256032" cy="256032"/>
+            <a:off x="749808" y="5234178"/>
+            <a:ext cx="310896" cy="310896"/>
           </a:xfrm>
           <a:prstGeom prst="rect">
             <a:avLst/>
@@ -5894,8 +6008,8 @@
         </p:blipFill>
         <p:spPr>
           <a:xfrm>
-            <a:off x="749808" y="5126863"/>
-            <a:ext cx="310896" cy="310896"/>
+            <a:off x="8399069" y="2446782"/>
+            <a:ext cx="256032" cy="256032"/>
           </a:xfrm>
           <a:prstGeom prst="rect">
             <a:avLst/>
@@ -6620,7 +6734,7 @@
         </p:blipFill>
         <p:spPr>
           <a:xfrm>
-            <a:off x="6355080" y="1965960"/>
+            <a:off x="822960" y="2926080"/>
             <a:ext cx="256032" cy="256032"/>
           </a:xfrm>
           <a:prstGeom prst="rect">
@@ -6644,7 +6758,7 @@
         </p:blipFill>
         <p:spPr>
           <a:xfrm>
-            <a:off x="822960" y="2926080"/>
+            <a:off x="6355080" y="1965960"/>
             <a:ext cx="256032" cy="256032"/>
           </a:xfrm>
           <a:prstGeom prst="rect">
@@ -6668,7 +6782,7 @@
         </p:blipFill>
         <p:spPr>
           <a:xfrm>
-            <a:off x="6355080" y="2926080"/>
+            <a:off x="822960" y="3886200"/>
             <a:ext cx="256032" cy="256032"/>
           </a:xfrm>
           <a:prstGeom prst="rect">
@@ -6692,7 +6806,7 @@
         </p:blipFill>
         <p:spPr>
           <a:xfrm>
-            <a:off x="822960" y="3886200"/>
+            <a:off x="6355080" y="2926080"/>
             <a:ext cx="256032" cy="256032"/>
           </a:xfrm>
           <a:prstGeom prst="rect">
@@ -8263,7 +8377,7 @@
                   <a:srgbClr val="1D2D3E"/>
                 </a:solidFill>
               </a:rPr>
-              <a:t>agrupamos os dados de uma conexão de voo em uma estrutura e aprendemos a copiá-los com segurança entre tipos diferentes.</a:t>
+              <a:t>agrupamos os dados de um endereço, o resultado da consulta de CEP do projeto Pedidos de Compras, em estruturas e aprendemos a copiá-los com segurança entre tipos diferentes.</a:t>
             </a:r>
             <a:endParaRPr lang="en-US" sz="1400" dirty="0"/>
           </a:p>
@@ -8333,7 +8447,7 @@
         </p:blipFill>
         <p:spPr>
           <a:xfrm>
-            <a:off x="8275091" y="1847088"/>
+            <a:off x="11094415" y="1847088"/>
             <a:ext cx="347472" cy="347472"/>
           </a:xfrm>
           <a:prstGeom prst="rect">
@@ -8357,7 +8471,7 @@
         </p:blipFill>
         <p:spPr>
           <a:xfrm>
-            <a:off x="11094415" y="1847088"/>
+            <a:off x="2636444" y="3858768"/>
             <a:ext cx="347472" cy="347472"/>
           </a:xfrm>
           <a:prstGeom prst="rect">
@@ -8381,7 +8495,7 @@
         </p:blipFill>
         <p:spPr>
           <a:xfrm>
-            <a:off x="2636444" y="3858768"/>
+            <a:off x="8275091" y="1847088"/>
             <a:ext cx="347472" cy="347472"/>
           </a:xfrm>
           <a:prstGeom prst="rect">
@@ -8405,7 +8519,7 @@
         </p:blipFill>
         <p:spPr>
           <a:xfrm>
-            <a:off x="5455768" y="3858768"/>
+            <a:off x="11094415" y="3858768"/>
             <a:ext cx="347472" cy="347472"/>
           </a:xfrm>
           <a:prstGeom prst="rect">
@@ -8453,7 +8567,7 @@
         </p:blipFill>
         <p:spPr>
           <a:xfrm>
-            <a:off x="11094415" y="3858768"/>
+            <a:off x="5455768" y="3858768"/>
             <a:ext cx="347472" cy="347472"/>
           </a:xfrm>
           <a:prstGeom prst="rect">
@@ -8974,7 +9088,29 @@
                 <a:ea typeface="Courier New" pitchFamily="34" charset="-122"/>
                 <a:cs typeface="Courier New" pitchFamily="34" charset="-120"/>
               </a:rPr>
-              <a:t>airport_from_id</a:t>
+              <a:t>cep</a:t>
+            </a:r>
+            <a:r>
+              <a:rPr lang="en-US" sz="1050" dirty="0">
+                <a:solidFill>
+                  <a:srgbClr val="CCCCCC"/>
+                </a:solidFill>
+                <a:latin typeface="Courier New" pitchFamily="34" charset="0"/>
+                <a:ea typeface="Courier New" pitchFamily="34" charset="-122"/>
+                <a:cs typeface="Courier New" pitchFamily="34" charset="-120"/>
+              </a:rPr>
+              <a:t>        </a:t>
+            </a:r>
+            <a:r>
+              <a:rPr lang="en-US" sz="1050" dirty="0">
+                <a:solidFill>
+                  <a:srgbClr val="569CD6"/>
+                </a:solidFill>
+                <a:latin typeface="Courier New" pitchFamily="34" charset="0"/>
+                <a:ea typeface="Courier New" pitchFamily="34" charset="-122"/>
+                <a:cs typeface="Courier New" pitchFamily="34" charset="-120"/>
+              </a:rPr>
+              <a:t>TYPE</a:t>
             </a:r>
             <a:r>
               <a:rPr lang="en-US" sz="1050" dirty="0">
@@ -8990,35 +9126,13 @@
             <a:r>
               <a:rPr lang="en-US" sz="1050" dirty="0">
                 <a:solidFill>
-                  <a:srgbClr val="569CD6"/>
-                </a:solidFill>
-                <a:latin typeface="Courier New" pitchFamily="34" charset="0"/>
-                <a:ea typeface="Courier New" pitchFamily="34" charset="-122"/>
-                <a:cs typeface="Courier New" pitchFamily="34" charset="-120"/>
-              </a:rPr>
-              <a:t>TYPE</a:t>
-            </a:r>
-            <a:r>
-              <a:rPr lang="en-US" sz="1050" dirty="0">
-                <a:solidFill>
-                  <a:srgbClr val="CCCCCC"/>
-                </a:solidFill>
-                <a:latin typeface="Courier New" pitchFamily="34" charset="0"/>
-                <a:ea typeface="Courier New" pitchFamily="34" charset="-122"/>
-                <a:cs typeface="Courier New" pitchFamily="34" charset="-120"/>
-              </a:rPr>
-              <a:t> </a:t>
-            </a:r>
-            <a:r>
-              <a:rPr lang="en-US" sz="1050" dirty="0">
-                <a:solidFill>
-                  <a:srgbClr val="4EC9B0"/>
-                </a:solidFill>
-                <a:latin typeface="Courier New" pitchFamily="34" charset="0"/>
-                <a:ea typeface="Courier New" pitchFamily="34" charset="-122"/>
-                <a:cs typeface="Courier New" pitchFamily="34" charset="-120"/>
-              </a:rPr>
-              <a:t>/dmo/airport_from_id</a:t>
+                  <a:srgbClr val="CCCCCC"/>
+                </a:solidFill>
+                <a:latin typeface="Courier New" pitchFamily="34" charset="0"/>
+                <a:ea typeface="Courier New" pitchFamily="34" charset="-122"/>
+                <a:cs typeface="Courier New" pitchFamily="34" charset="-120"/>
+              </a:rPr>
+              <a:t>string</a:t>
             </a:r>
             <a:r>
               <a:rPr lang="en-US" sz="1050" dirty="0">
@@ -9071,18 +9185,18 @@
                 <a:ea typeface="Courier New" pitchFamily="34" charset="-122"/>
                 <a:cs typeface="Courier New" pitchFamily="34" charset="-120"/>
               </a:rPr>
-              <a:t>airport_to_id</a:t>
-            </a:r>
-            <a:r>
-              <a:rPr lang="en-US" sz="1050" dirty="0">
-                <a:solidFill>
-                  <a:srgbClr val="CCCCCC"/>
-                </a:solidFill>
-                <a:latin typeface="Courier New" pitchFamily="34" charset="0"/>
-                <a:ea typeface="Courier New" pitchFamily="34" charset="-122"/>
-                <a:cs typeface="Courier New" pitchFamily="34" charset="-120"/>
-              </a:rPr>
-              <a:t>   </a:t>
+              <a:t>logradouro</a:t>
+            </a:r>
+            <a:r>
+              <a:rPr lang="en-US" sz="1050" dirty="0">
+                <a:solidFill>
+                  <a:srgbClr val="CCCCCC"/>
+                </a:solidFill>
+                <a:latin typeface="Courier New" pitchFamily="34" charset="0"/>
+                <a:ea typeface="Courier New" pitchFamily="34" charset="-122"/>
+                <a:cs typeface="Courier New" pitchFamily="34" charset="-120"/>
+              </a:rPr>
+              <a:t> </a:t>
             </a:r>
             <a:r>
               <a:rPr lang="en-US" sz="1050" dirty="0">
@@ -9109,13 +9223,13 @@
             <a:r>
               <a:rPr lang="en-US" sz="1050" dirty="0">
                 <a:solidFill>
-                  <a:srgbClr val="4EC9B0"/>
-                </a:solidFill>
-                <a:latin typeface="Courier New" pitchFamily="34" charset="0"/>
-                <a:ea typeface="Courier New" pitchFamily="34" charset="-122"/>
-                <a:cs typeface="Courier New" pitchFamily="34" charset="-120"/>
-              </a:rPr>
-              <a:t>/dmo/airport_to_id</a:t>
+                  <a:srgbClr val="CCCCCC"/>
+                </a:solidFill>
+                <a:latin typeface="Courier New" pitchFamily="34" charset="0"/>
+                <a:ea typeface="Courier New" pitchFamily="34" charset="-122"/>
+                <a:cs typeface="Courier New" pitchFamily="34" charset="-120"/>
+              </a:rPr>
+              <a:t>string</a:t>
             </a:r>
             <a:r>
               <a:rPr lang="en-US" sz="1050" dirty="0">
@@ -9168,18 +9282,18 @@
                 <a:ea typeface="Courier New" pitchFamily="34" charset="-122"/>
                 <a:cs typeface="Courier New" pitchFamily="34" charset="-120"/>
               </a:rPr>
-              <a:t>carrier_name</a:t>
-            </a:r>
-            <a:r>
-              <a:rPr lang="en-US" sz="1050" dirty="0">
-                <a:solidFill>
-                  <a:srgbClr val="CCCCCC"/>
-                </a:solidFill>
-                <a:latin typeface="Courier New" pitchFamily="34" charset="0"/>
-                <a:ea typeface="Courier New" pitchFamily="34" charset="-122"/>
-                <a:cs typeface="Courier New" pitchFamily="34" charset="-120"/>
-              </a:rPr>
-              <a:t>    </a:t>
+              <a:t>localidade</a:t>
+            </a:r>
+            <a:r>
+              <a:rPr lang="en-US" sz="1050" dirty="0">
+                <a:solidFill>
+                  <a:srgbClr val="CCCCCC"/>
+                </a:solidFill>
+                <a:latin typeface="Courier New" pitchFamily="34" charset="0"/>
+                <a:ea typeface="Courier New" pitchFamily="34" charset="-122"/>
+                <a:cs typeface="Courier New" pitchFamily="34" charset="-120"/>
+              </a:rPr>
+              <a:t> </a:t>
             </a:r>
             <a:r>
               <a:rPr lang="en-US" sz="1050" dirty="0">
@@ -9206,13 +9320,13 @@
             <a:r>
               <a:rPr lang="en-US" sz="1050" dirty="0">
                 <a:solidFill>
-                  <a:srgbClr val="4EC9B0"/>
-                </a:solidFill>
-                <a:latin typeface="Courier New" pitchFamily="34" charset="0"/>
-                <a:ea typeface="Courier New" pitchFamily="34" charset="-122"/>
-                <a:cs typeface="Courier New" pitchFamily="34" charset="-120"/>
-              </a:rPr>
-              <a:t>/dmo/carrier_name</a:t>
+                  <a:srgbClr val="CCCCCC"/>
+                </a:solidFill>
+                <a:latin typeface="Courier New" pitchFamily="34" charset="0"/>
+                <a:ea typeface="Courier New" pitchFamily="34" charset="-122"/>
+                <a:cs typeface="Courier New" pitchFamily="34" charset="-120"/>
+              </a:rPr>
+              <a:t>string</a:t>
             </a:r>
             <a:r>
               <a:rPr lang="en-US" sz="1050" dirty="0">
@@ -9279,7 +9393,7 @@
                   <a:srgbClr val="556B82"/>
                 </a:solidFill>
               </a:rPr>
-              <a:t>Cada variável é independente: o programa não sabe que as três descrevem a mesma conexão.</a:t>
+              <a:t>Cada variável é independente: o programa não sabe que as três descrevem o mesmo endereço.</a:t>
             </a:r>
             <a:endParaRPr lang="en-US" sz="1400" dirty="0"/>
           </a:p>
@@ -9628,7 +9742,7 @@
                 <a:ea typeface="Courier New" pitchFamily="34" charset="-122"/>
                 <a:cs typeface="Courier New" pitchFamily="34" charset="-120"/>
               </a:rPr>
-              <a:t>connection</a:t>
+              <a:t>endereco</a:t>
             </a:r>
             <a:r>
               <a:rPr lang="en-US" sz="1050" dirty="0">
@@ -9672,7 +9786,18 @@
                 <a:ea typeface="Courier New" pitchFamily="34" charset="-122"/>
                 <a:cs typeface="Courier New" pitchFamily="34" charset="-120"/>
               </a:rPr>
-              <a:t>/DMO/I_Connection</a:t>
+              <a:t>zif_pc_viacep=&gt;</a:t>
+            </a:r>
+            <a:r>
+              <a:rPr lang="en-US" sz="1050" dirty="0">
+                <a:solidFill>
+                  <a:srgbClr val="CCCCCC"/>
+                </a:solidFill>
+                <a:latin typeface="Courier New" pitchFamily="34" charset="0"/>
+                <a:ea typeface="Courier New" pitchFamily="34" charset="-122"/>
+                <a:cs typeface="Courier New" pitchFamily="34" charset="-120"/>
+              </a:rPr>
+              <a:t>ty_endereco</a:t>
             </a:r>
             <a:r>
               <a:rPr lang="en-US" sz="1050" dirty="0">
@@ -9723,18 +9848,18 @@
                 <a:ea typeface="Courier New" pitchFamily="34" charset="-122"/>
                 <a:cs typeface="Courier New" pitchFamily="34" charset="-120"/>
               </a:rPr>
-              <a:t>connection-AirlineID</a:t>
-            </a:r>
-            <a:r>
-              <a:rPr lang="en-US" sz="1050" dirty="0">
-                <a:solidFill>
-                  <a:srgbClr val="CCCCCC"/>
-                </a:solidFill>
-                <a:latin typeface="Courier New" pitchFamily="34" charset="0"/>
-                <a:ea typeface="Courier New" pitchFamily="34" charset="-122"/>
-                <a:cs typeface="Courier New" pitchFamily="34" charset="-120"/>
-              </a:rPr>
-              <a:t>    </a:t>
+              <a:t>endereco-cep</a:t>
+            </a:r>
+            <a:r>
+              <a:rPr lang="en-US" sz="1050" dirty="0">
+                <a:solidFill>
+                  <a:srgbClr val="CCCCCC"/>
+                </a:solidFill>
+                <a:latin typeface="Courier New" pitchFamily="34" charset="0"/>
+                <a:ea typeface="Courier New" pitchFamily="34" charset="-122"/>
+                <a:cs typeface="Courier New" pitchFamily="34" charset="-120"/>
+              </a:rPr>
+              <a:t> </a:t>
             </a:r>
             <a:r>
               <a:rPr lang="en-US" sz="1050" dirty="0">
@@ -9767,7 +9892,7 @@
                 <a:ea typeface="Courier New" pitchFamily="34" charset="-122"/>
                 <a:cs typeface="Courier New" pitchFamily="34" charset="-120"/>
               </a:rPr>
-              <a:t>'LH'</a:t>
+              <a:t>'01310100'</a:t>
             </a:r>
             <a:r>
               <a:rPr lang="en-US" sz="1050" dirty="0">
@@ -9798,7 +9923,29 @@
                 <a:ea typeface="Courier New" pitchFamily="34" charset="-122"/>
                 <a:cs typeface="Courier New" pitchFamily="34" charset="-120"/>
               </a:rPr>
-              <a:t>connection-ConnectionID</a:t>
+              <a:t>endereco-uf</a:t>
+            </a:r>
+            <a:r>
+              <a:rPr lang="en-US" sz="1050" dirty="0">
+                <a:solidFill>
+                  <a:srgbClr val="CCCCCC"/>
+                </a:solidFill>
+                <a:latin typeface="Courier New" pitchFamily="34" charset="0"/>
+                <a:ea typeface="Courier New" pitchFamily="34" charset="-122"/>
+                <a:cs typeface="Courier New" pitchFamily="34" charset="-120"/>
+              </a:rPr>
+              <a:t>  </a:t>
+            </a:r>
+            <a:r>
+              <a:rPr lang="en-US" sz="1050" dirty="0">
+                <a:solidFill>
+                  <a:srgbClr val="CCCCCC"/>
+                </a:solidFill>
+                <a:latin typeface="Courier New" pitchFamily="34" charset="0"/>
+                <a:ea typeface="Courier New" pitchFamily="34" charset="-122"/>
+                <a:cs typeface="Courier New" pitchFamily="34" charset="-120"/>
+              </a:rPr>
+              <a:t>=</a:t>
             </a:r>
             <a:r>
               <a:rPr lang="en-US" sz="1050" dirty="0">
@@ -9814,35 +9961,13 @@
             <a:r>
               <a:rPr lang="en-US" sz="1050" dirty="0">
                 <a:solidFill>
-                  <a:srgbClr val="CCCCCC"/>
-                </a:solidFill>
-                <a:latin typeface="Courier New" pitchFamily="34" charset="0"/>
-                <a:ea typeface="Courier New" pitchFamily="34" charset="-122"/>
-                <a:cs typeface="Courier New" pitchFamily="34" charset="-120"/>
-              </a:rPr>
-              <a:t>=</a:t>
-            </a:r>
-            <a:r>
-              <a:rPr lang="en-US" sz="1050" dirty="0">
-                <a:solidFill>
-                  <a:srgbClr val="CCCCCC"/>
-                </a:solidFill>
-                <a:latin typeface="Courier New" pitchFamily="34" charset="0"/>
-                <a:ea typeface="Courier New" pitchFamily="34" charset="-122"/>
-                <a:cs typeface="Courier New" pitchFamily="34" charset="-120"/>
-              </a:rPr>
-              <a:t> </a:t>
-            </a:r>
-            <a:r>
-              <a:rPr lang="en-US" sz="1050" dirty="0">
-                <a:solidFill>
                   <a:srgbClr val="CE9178"/>
                 </a:solidFill>
                 <a:latin typeface="Courier New" pitchFamily="34" charset="0"/>
                 <a:ea typeface="Courier New" pitchFamily="34" charset="-122"/>
                 <a:cs typeface="Courier New" pitchFamily="34" charset="-120"/>
               </a:rPr>
-              <a:t>'0400'</a:t>
+              <a:t>'SP'</a:t>
             </a:r>
             <a:r>
               <a:rPr lang="en-US" sz="1050" dirty="0">
@@ -10360,7 +10485,7 @@
                 <a:ea typeface="Courier New" pitchFamily="34" charset="-122"/>
                 <a:cs typeface="Courier New" pitchFamily="34" charset="-120"/>
               </a:rPr>
-              <a:t>TYPE /DMO/I_…</a:t>
+              <a:t>TYPE zr_pc_…</a:t>
             </a:r>
             <a:r>
               <a:rPr lang="en-US" sz="1000" dirty="0">
@@ -10665,7 +10790,7 @@
                   <a:srgbClr val="FFFFFF"/>
                 </a:solidFill>
               </a:rPr>
-              <a:t>zcl_05_struct.clas.abap</a:t>
+              <a:t>zif_pc_viacep.intf.abap</a:t>
             </a:r>
             <a:endParaRPr lang="en-US" sz="950" dirty="0"/>
           </a:p>
@@ -10701,7 +10826,7 @@
                   <a:srgbClr val="9DA5B4"/>
                 </a:solidFill>
               </a:rPr>
-              <a:t>ZS4D400_## › ZCL_05_STRUCT › main</a:t>
+              <a:t>ZAVBS_PC_COMMON › ZIF_PC_VIACEP (simplificada) e uso</a:t>
             </a:r>
             <a:endParaRPr lang="en-US" sz="850" dirty="0"/>
           </a:p>
@@ -11027,6 +11152,26 @@
             </a:r>
             <a:endParaRPr lang="en-US" sz="1050" dirty="0"/>
           </a:p>
+          <a:p>
+            <a:pPr algn="r" indent="0" marL="0">
+              <a:lnSpc>
+                <a:spcPct val="105000"/>
+              </a:lnSpc>
+              <a:buNone/>
+            </a:pPr>
+            <a:r>
+              <a:rPr lang="en-US" sz="1050" dirty="0">
+                <a:solidFill>
+                  <a:srgbClr val="6E7681"/>
+                </a:solidFill>
+                <a:latin typeface="Courier New" pitchFamily="34" charset="0"/>
+                <a:ea typeface="Courier New" pitchFamily="34" charset="-122"/>
+                <a:cs typeface="Courier New" pitchFamily="34" charset="-120"/>
+              </a:rPr>
+              <a:t>16</a:t>
+            </a:r>
+            <a:endParaRPr lang="en-US" sz="1050" dirty="0"/>
+          </a:p>
         </p:txBody>
       </p:sp>
       <p:sp>
@@ -11142,7 +11287,7 @@
                 <a:ea typeface="Courier New" pitchFamily="34" charset="-122"/>
                 <a:cs typeface="Courier New" pitchFamily="34" charset="-120"/>
               </a:rPr>
-              <a:t>st_connection</a:t>
+              <a:t>ty_endereco</a:t>
             </a:r>
             <a:r>
               <a:rPr lang="en-US" sz="1050" dirty="0">
@@ -11184,7 +11329,29 @@
                 <a:ea typeface="Courier New" pitchFamily="34" charset="-122"/>
                 <a:cs typeface="Courier New" pitchFamily="34" charset="-120"/>
               </a:rPr>
-              <a:t>airport_from_id</a:t>
+              <a:t>cep</a:t>
+            </a:r>
+            <a:r>
+              <a:rPr lang="en-US" sz="1050" dirty="0">
+                <a:solidFill>
+                  <a:srgbClr val="CCCCCC"/>
+                </a:solidFill>
+                <a:latin typeface="Courier New" pitchFamily="34" charset="0"/>
+                <a:ea typeface="Courier New" pitchFamily="34" charset="-122"/>
+                <a:cs typeface="Courier New" pitchFamily="34" charset="-120"/>
+              </a:rPr>
+              <a:t>        </a:t>
+            </a:r>
+            <a:r>
+              <a:rPr lang="en-US" sz="1050" dirty="0">
+                <a:solidFill>
+                  <a:srgbClr val="569CD6"/>
+                </a:solidFill>
+                <a:latin typeface="Courier New" pitchFamily="34" charset="0"/>
+                <a:ea typeface="Courier New" pitchFamily="34" charset="-122"/>
+                <a:cs typeface="Courier New" pitchFamily="34" charset="-120"/>
+              </a:rPr>
+              <a:t>TYPE</a:t>
             </a:r>
             <a:r>
               <a:rPr lang="en-US" sz="1050" dirty="0">
@@ -11200,35 +11367,13 @@
             <a:r>
               <a:rPr lang="en-US" sz="1050" dirty="0">
                 <a:solidFill>
-                  <a:srgbClr val="569CD6"/>
-                </a:solidFill>
-                <a:latin typeface="Courier New" pitchFamily="34" charset="0"/>
-                <a:ea typeface="Courier New" pitchFamily="34" charset="-122"/>
-                <a:cs typeface="Courier New" pitchFamily="34" charset="-120"/>
-              </a:rPr>
-              <a:t>TYPE</a:t>
-            </a:r>
-            <a:r>
-              <a:rPr lang="en-US" sz="1050" dirty="0">
-                <a:solidFill>
-                  <a:srgbClr val="CCCCCC"/>
-                </a:solidFill>
-                <a:latin typeface="Courier New" pitchFamily="34" charset="0"/>
-                <a:ea typeface="Courier New" pitchFamily="34" charset="-122"/>
-                <a:cs typeface="Courier New" pitchFamily="34" charset="-120"/>
-              </a:rPr>
-              <a:t> </a:t>
-            </a:r>
-            <a:r>
-              <a:rPr lang="en-US" sz="1050" dirty="0">
-                <a:solidFill>
-                  <a:srgbClr val="4EC9B0"/>
-                </a:solidFill>
-                <a:latin typeface="Courier New" pitchFamily="34" charset="0"/>
-                <a:ea typeface="Courier New" pitchFamily="34" charset="-122"/>
-                <a:cs typeface="Courier New" pitchFamily="34" charset="-120"/>
-              </a:rPr>
-              <a:t>/dmo/airport_from_id</a:t>
+                  <a:srgbClr val="CCCCCC"/>
+                </a:solidFill>
+                <a:latin typeface="Courier New" pitchFamily="34" charset="0"/>
+                <a:ea typeface="Courier New" pitchFamily="34" charset="-122"/>
+                <a:cs typeface="Courier New" pitchFamily="34" charset="-120"/>
+              </a:rPr>
+              <a:t>string</a:t>
             </a:r>
             <a:r>
               <a:rPr lang="en-US" sz="1050" dirty="0">
@@ -11270,18 +11415,18 @@
                 <a:ea typeface="Courier New" pitchFamily="34" charset="-122"/>
                 <a:cs typeface="Courier New" pitchFamily="34" charset="-120"/>
               </a:rPr>
-              <a:t>airport_to_id</a:t>
-            </a:r>
-            <a:r>
-              <a:rPr lang="en-US" sz="1050" dirty="0">
-                <a:solidFill>
-                  <a:srgbClr val="CCCCCC"/>
-                </a:solidFill>
-                <a:latin typeface="Courier New" pitchFamily="34" charset="0"/>
-                <a:ea typeface="Courier New" pitchFamily="34" charset="-122"/>
-                <a:cs typeface="Courier New" pitchFamily="34" charset="-120"/>
-              </a:rPr>
-              <a:t>   </a:t>
+              <a:t>logradouro</a:t>
+            </a:r>
+            <a:r>
+              <a:rPr lang="en-US" sz="1050" dirty="0">
+                <a:solidFill>
+                  <a:srgbClr val="CCCCCC"/>
+                </a:solidFill>
+                <a:latin typeface="Courier New" pitchFamily="34" charset="0"/>
+                <a:ea typeface="Courier New" pitchFamily="34" charset="-122"/>
+                <a:cs typeface="Courier New" pitchFamily="34" charset="-120"/>
+              </a:rPr>
+              <a:t> </a:t>
             </a:r>
             <a:r>
               <a:rPr lang="en-US" sz="1050" dirty="0">
@@ -11308,13 +11453,13 @@
             <a:r>
               <a:rPr lang="en-US" sz="1050" dirty="0">
                 <a:solidFill>
-                  <a:srgbClr val="4EC9B0"/>
-                </a:solidFill>
-                <a:latin typeface="Courier New" pitchFamily="34" charset="0"/>
-                <a:ea typeface="Courier New" pitchFamily="34" charset="-122"/>
-                <a:cs typeface="Courier New" pitchFamily="34" charset="-120"/>
-              </a:rPr>
-              <a:t>/dmo/airport_to_id</a:t>
+                  <a:srgbClr val="CCCCCC"/>
+                </a:solidFill>
+                <a:latin typeface="Courier New" pitchFamily="34" charset="0"/>
+                <a:ea typeface="Courier New" pitchFamily="34" charset="-122"/>
+                <a:cs typeface="Courier New" pitchFamily="34" charset="-120"/>
+              </a:rPr>
+              <a:t>string</a:t>
             </a:r>
             <a:r>
               <a:rPr lang="en-US" sz="1050" dirty="0">
@@ -11356,18 +11501,18 @@
                 <a:ea typeface="Courier New" pitchFamily="34" charset="-122"/>
                 <a:cs typeface="Courier New" pitchFamily="34" charset="-120"/>
               </a:rPr>
-              <a:t>carrier_name</a:t>
-            </a:r>
-            <a:r>
-              <a:rPr lang="en-US" sz="1050" dirty="0">
-                <a:solidFill>
-                  <a:srgbClr val="CCCCCC"/>
-                </a:solidFill>
-                <a:latin typeface="Courier New" pitchFamily="34" charset="0"/>
-                <a:ea typeface="Courier New" pitchFamily="34" charset="-122"/>
-                <a:cs typeface="Courier New" pitchFamily="34" charset="-120"/>
-              </a:rPr>
-              <a:t>    </a:t>
+              <a:t>localidade</a:t>
+            </a:r>
+            <a:r>
+              <a:rPr lang="en-US" sz="1050" dirty="0">
+                <a:solidFill>
+                  <a:srgbClr val="CCCCCC"/>
+                </a:solidFill>
+                <a:latin typeface="Courier New" pitchFamily="34" charset="0"/>
+                <a:ea typeface="Courier New" pitchFamily="34" charset="-122"/>
+                <a:cs typeface="Courier New" pitchFamily="34" charset="-120"/>
+              </a:rPr>
+              <a:t> </a:t>
             </a:r>
             <a:r>
               <a:rPr lang="en-US" sz="1050" dirty="0">
@@ -11394,13 +11539,13 @@
             <a:r>
               <a:rPr lang="en-US" sz="1050" dirty="0">
                 <a:solidFill>
-                  <a:srgbClr val="4EC9B0"/>
-                </a:solidFill>
-                <a:latin typeface="Courier New" pitchFamily="34" charset="0"/>
-                <a:ea typeface="Courier New" pitchFamily="34" charset="-122"/>
-                <a:cs typeface="Courier New" pitchFamily="34" charset="-120"/>
-              </a:rPr>
-              <a:t>/dmo/carrier_name</a:t>
+                  <a:srgbClr val="CCCCCC"/>
+                </a:solidFill>
+                <a:latin typeface="Courier New" pitchFamily="34" charset="0"/>
+                <a:ea typeface="Courier New" pitchFamily="34" charset="-122"/>
+                <a:cs typeface="Courier New" pitchFamily="34" charset="-120"/>
+              </a:rPr>
+              <a:t>string</a:t>
             </a:r>
             <a:r>
               <a:rPr lang="en-US" sz="1050" dirty="0">
@@ -11431,7 +11576,29 @@
                 <a:ea typeface="Courier New" pitchFamily="34" charset="-122"/>
                 <a:cs typeface="Courier New" pitchFamily="34" charset="-120"/>
               </a:rPr>
-              <a:t>       </a:t>
+              <a:t>         </a:t>
+            </a:r>
+            <a:r>
+              <a:rPr lang="en-US" sz="1050" dirty="0">
+                <a:solidFill>
+                  <a:srgbClr val="CCCCCC"/>
+                </a:solidFill>
+                <a:latin typeface="Courier New" pitchFamily="34" charset="0"/>
+                <a:ea typeface="Courier New" pitchFamily="34" charset="-122"/>
+                <a:cs typeface="Courier New" pitchFamily="34" charset="-120"/>
+              </a:rPr>
+              <a:t>uf</a:t>
+            </a:r>
+            <a:r>
+              <a:rPr lang="en-US" sz="1050" dirty="0">
+                <a:solidFill>
+                  <a:srgbClr val="CCCCCC"/>
+                </a:solidFill>
+                <a:latin typeface="Courier New" pitchFamily="34" charset="0"/>
+                <a:ea typeface="Courier New" pitchFamily="34" charset="-122"/>
+                <a:cs typeface="Courier New" pitchFamily="34" charset="-120"/>
+              </a:rPr>
+              <a:t>         </a:t>
             </a:r>
             <a:r>
               <a:rPr lang="en-US" sz="1050" dirty="0">
@@ -11442,7 +11609,7 @@
                 <a:ea typeface="Courier New" pitchFamily="34" charset="-122"/>
                 <a:cs typeface="Courier New" pitchFamily="34" charset="-120"/>
               </a:rPr>
-              <a:t>END</a:t>
+              <a:t>TYPE</a:t>
             </a:r>
             <a:r>
               <a:rPr lang="en-US" sz="1050" dirty="0">
@@ -11458,46 +11625,24 @@
             <a:r>
               <a:rPr lang="en-US" sz="1050" dirty="0">
                 <a:solidFill>
-                  <a:srgbClr val="569CD6"/>
-                </a:solidFill>
-                <a:latin typeface="Courier New" pitchFamily="34" charset="0"/>
-                <a:ea typeface="Courier New" pitchFamily="34" charset="-122"/>
-                <a:cs typeface="Courier New" pitchFamily="34" charset="-120"/>
-              </a:rPr>
-              <a:t>OF</a:t>
-            </a:r>
-            <a:r>
-              <a:rPr lang="en-US" sz="1050" dirty="0">
-                <a:solidFill>
-                  <a:srgbClr val="CCCCCC"/>
-                </a:solidFill>
-                <a:latin typeface="Courier New" pitchFamily="34" charset="0"/>
-                <a:ea typeface="Courier New" pitchFamily="34" charset="-122"/>
-                <a:cs typeface="Courier New" pitchFamily="34" charset="-120"/>
-              </a:rPr>
-              <a:t> </a:t>
-            </a:r>
-            <a:r>
-              <a:rPr lang="en-US" sz="1050" dirty="0">
-                <a:solidFill>
-                  <a:srgbClr val="CCCCCC"/>
-                </a:solidFill>
-                <a:latin typeface="Courier New" pitchFamily="34" charset="0"/>
-                <a:ea typeface="Courier New" pitchFamily="34" charset="-122"/>
-                <a:cs typeface="Courier New" pitchFamily="34" charset="-120"/>
-              </a:rPr>
-              <a:t>st_connection</a:t>
-            </a:r>
-            <a:r>
-              <a:rPr lang="en-US" sz="1050" dirty="0">
-                <a:solidFill>
-                  <a:srgbClr val="CCCCCC"/>
-                </a:solidFill>
-                <a:latin typeface="Courier New" pitchFamily="34" charset="0"/>
-                <a:ea typeface="Courier New" pitchFamily="34" charset="-122"/>
-                <a:cs typeface="Courier New" pitchFamily="34" charset="-120"/>
-              </a:rPr>
-              <a:t>.</a:t>
+                  <a:srgbClr val="CCCCCC"/>
+                </a:solidFill>
+                <a:latin typeface="Courier New" pitchFamily="34" charset="0"/>
+                <a:ea typeface="Courier New" pitchFamily="34" charset="-122"/>
+                <a:cs typeface="Courier New" pitchFamily="34" charset="-120"/>
+              </a:rPr>
+              <a:t>string</a:t>
+            </a:r>
+            <a:r>
+              <a:rPr lang="en-US" sz="1050" dirty="0">
+                <a:solidFill>
+                  <a:srgbClr val="CCCCCC"/>
+                </a:solidFill>
+                <a:latin typeface="Courier New" pitchFamily="34" charset="0"/>
+                <a:ea typeface="Courier New" pitchFamily="34" charset="-122"/>
+                <a:cs typeface="Courier New" pitchFamily="34" charset="-120"/>
+              </a:rPr>
+              <a:t>,</a:t>
             </a:r>
             <a:endParaRPr lang="en-US" sz="1050" dirty="0"/>
           </a:p>
@@ -11511,13 +11656,79 @@
             <a:r>
               <a:rPr lang="en-US" sz="1050" dirty="0">
                 <a:solidFill>
-                  <a:srgbClr val="000000"/>
+                  <a:srgbClr val="CCCCCC"/>
+                </a:solidFill>
+                <a:latin typeface="Courier New" pitchFamily="34" charset="0"/>
+                <a:ea typeface="Courier New" pitchFamily="34" charset="-122"/>
+                <a:cs typeface="Courier New" pitchFamily="34" charset="-120"/>
+              </a:rPr>
+              <a:t>       </a:t>
+            </a:r>
+            <a:r>
+              <a:rPr lang="en-US" sz="1050" dirty="0">
+                <a:solidFill>
+                  <a:srgbClr val="569CD6"/>
+                </a:solidFill>
+                <a:latin typeface="Courier New" pitchFamily="34" charset="0"/>
+                <a:ea typeface="Courier New" pitchFamily="34" charset="-122"/>
+                <a:cs typeface="Courier New" pitchFamily="34" charset="-120"/>
+              </a:rPr>
+              <a:t>END</a:t>
+            </a:r>
+            <a:r>
+              <a:rPr lang="en-US" sz="1050" dirty="0">
+                <a:solidFill>
+                  <a:srgbClr val="CCCCCC"/>
                 </a:solidFill>
                 <a:latin typeface="Courier New" pitchFamily="34" charset="0"/>
                 <a:ea typeface="Courier New" pitchFamily="34" charset="-122"/>
                 <a:cs typeface="Courier New" pitchFamily="34" charset="-120"/>
               </a:rPr>
               <a:t> </a:t>
+            </a:r>
+            <a:r>
+              <a:rPr lang="en-US" sz="1050" dirty="0">
+                <a:solidFill>
+                  <a:srgbClr val="569CD6"/>
+                </a:solidFill>
+                <a:latin typeface="Courier New" pitchFamily="34" charset="0"/>
+                <a:ea typeface="Courier New" pitchFamily="34" charset="-122"/>
+                <a:cs typeface="Courier New" pitchFamily="34" charset="-120"/>
+              </a:rPr>
+              <a:t>OF</a:t>
+            </a:r>
+            <a:r>
+              <a:rPr lang="en-US" sz="1050" dirty="0">
+                <a:solidFill>
+                  <a:srgbClr val="CCCCCC"/>
+                </a:solidFill>
+                <a:latin typeface="Courier New" pitchFamily="34" charset="0"/>
+                <a:ea typeface="Courier New" pitchFamily="34" charset="-122"/>
+                <a:cs typeface="Courier New" pitchFamily="34" charset="-120"/>
+              </a:rPr>
+              <a:t> </a:t>
+            </a:r>
+            <a:r>
+              <a:rPr lang="en-US" sz="1050" dirty="0">
+                <a:solidFill>
+                  <a:srgbClr val="CCCCCC"/>
+                </a:solidFill>
+                <a:latin typeface="Courier New" pitchFamily="34" charset="0"/>
+                <a:ea typeface="Courier New" pitchFamily="34" charset="-122"/>
+                <a:cs typeface="Courier New" pitchFamily="34" charset="-120"/>
+              </a:rPr>
+              <a:t>ty_endereco</a:t>
+            </a:r>
+            <a:r>
+              <a:rPr lang="en-US" sz="1050" dirty="0">
+                <a:solidFill>
+                  <a:srgbClr val="CCCCCC"/>
+                </a:solidFill>
+                <a:latin typeface="Courier New" pitchFamily="34" charset="0"/>
+                <a:ea typeface="Courier New" pitchFamily="34" charset="-122"/>
+                <a:cs typeface="Courier New" pitchFamily="34" charset="-120"/>
+              </a:rPr>
+              <a:t>.</a:t>
             </a:r>
             <a:endParaRPr lang="en-US" sz="1050" dirty="0"/>
           </a:p>
@@ -11531,101 +11742,13 @@
             <a:r>
               <a:rPr lang="en-US" sz="1050" dirty="0">
                 <a:solidFill>
-                  <a:srgbClr val="569CD6"/>
-                </a:solidFill>
-                <a:latin typeface="Courier New" pitchFamily="34" charset="0"/>
-                <a:ea typeface="Courier New" pitchFamily="34" charset="-122"/>
-                <a:cs typeface="Courier New" pitchFamily="34" charset="-120"/>
-              </a:rPr>
-              <a:t>TYPES</a:t>
-            </a:r>
-            <a:r>
-              <a:rPr lang="en-US" sz="1050" dirty="0">
-                <a:solidFill>
-                  <a:srgbClr val="CCCCCC"/>
-                </a:solidFill>
-                <a:latin typeface="Courier New" pitchFamily="34" charset="0"/>
-                <a:ea typeface="Courier New" pitchFamily="34" charset="-122"/>
-                <a:cs typeface="Courier New" pitchFamily="34" charset="-120"/>
-              </a:rPr>
-              <a:t>:</a:t>
-            </a:r>
-            <a:r>
-              <a:rPr lang="en-US" sz="1050" dirty="0">
-                <a:solidFill>
-                  <a:srgbClr val="CCCCCC"/>
+                  <a:srgbClr val="000000"/>
                 </a:solidFill>
                 <a:latin typeface="Courier New" pitchFamily="34" charset="0"/>
                 <a:ea typeface="Courier New" pitchFamily="34" charset="-122"/>
                 <a:cs typeface="Courier New" pitchFamily="34" charset="-120"/>
               </a:rPr>
               <a:t> </a:t>
-            </a:r>
-            <a:r>
-              <a:rPr lang="en-US" sz="1050" dirty="0">
-                <a:solidFill>
-                  <a:srgbClr val="569CD6"/>
-                </a:solidFill>
-                <a:latin typeface="Courier New" pitchFamily="34" charset="0"/>
-                <a:ea typeface="Courier New" pitchFamily="34" charset="-122"/>
-                <a:cs typeface="Courier New" pitchFamily="34" charset="-120"/>
-              </a:rPr>
-              <a:t>BEGIN</a:t>
-            </a:r>
-            <a:r>
-              <a:rPr lang="en-US" sz="1050" dirty="0">
-                <a:solidFill>
-                  <a:srgbClr val="CCCCCC"/>
-                </a:solidFill>
-                <a:latin typeface="Courier New" pitchFamily="34" charset="0"/>
-                <a:ea typeface="Courier New" pitchFamily="34" charset="-122"/>
-                <a:cs typeface="Courier New" pitchFamily="34" charset="-120"/>
-              </a:rPr>
-              <a:t> </a:t>
-            </a:r>
-            <a:r>
-              <a:rPr lang="en-US" sz="1050" dirty="0">
-                <a:solidFill>
-                  <a:srgbClr val="569CD6"/>
-                </a:solidFill>
-                <a:latin typeface="Courier New" pitchFamily="34" charset="0"/>
-                <a:ea typeface="Courier New" pitchFamily="34" charset="-122"/>
-                <a:cs typeface="Courier New" pitchFamily="34" charset="-120"/>
-              </a:rPr>
-              <a:t>OF</a:t>
-            </a:r>
-            <a:r>
-              <a:rPr lang="en-US" sz="1050" dirty="0">
-                <a:solidFill>
-                  <a:srgbClr val="CCCCCC"/>
-                </a:solidFill>
-                <a:latin typeface="Courier New" pitchFamily="34" charset="0"/>
-                <a:ea typeface="Courier New" pitchFamily="34" charset="-122"/>
-                <a:cs typeface="Courier New" pitchFamily="34" charset="-120"/>
-              </a:rPr>
-              <a:t> </a:t>
-            </a:r>
-            <a:r>
-              <a:rPr lang="en-US" sz="1050" dirty="0">
-                <a:solidFill>
-                  <a:srgbClr val="CCCCCC"/>
-                </a:solidFill>
-                <a:latin typeface="Courier New" pitchFamily="34" charset="0"/>
-                <a:ea typeface="Courier New" pitchFamily="34" charset="-122"/>
-                <a:cs typeface="Courier New" pitchFamily="34" charset="-120"/>
-              </a:rPr>
-              <a:t>st_connection_nested</a:t>
-            </a:r>
-            <a:r>
-              <a:rPr lang="en-US" sz="1050" dirty="0">
-                <a:solidFill>
-                  <a:srgbClr val="CCCCCC"/>
-                </a:solidFill>
-                <a:latin typeface="Courier New" pitchFamily="34" charset="0"/>
-                <a:ea typeface="Courier New" pitchFamily="34" charset="-122"/>
-                <a:cs typeface="Courier New" pitchFamily="34" charset="-120"/>
-              </a:rPr>
-              <a:t>,</a:t>
             </a:r>
             <a:endParaRPr lang="en-US" sz="1050" dirty="0"/>
           </a:p>
@@ -11639,24 +11762,24 @@
             <a:r>
               <a:rPr lang="en-US" sz="1050" dirty="0">
                 <a:solidFill>
-                  <a:srgbClr val="CCCCCC"/>
-                </a:solidFill>
-                <a:latin typeface="Courier New" pitchFamily="34" charset="0"/>
-                <a:ea typeface="Courier New" pitchFamily="34" charset="-122"/>
-                <a:cs typeface="Courier New" pitchFamily="34" charset="-120"/>
-              </a:rPr>
-              <a:t>         </a:t>
-            </a:r>
-            <a:r>
-              <a:rPr lang="en-US" sz="1050" dirty="0">
-                <a:solidFill>
-                  <a:srgbClr val="CCCCCC"/>
-                </a:solidFill>
-                <a:latin typeface="Courier New" pitchFamily="34" charset="0"/>
-                <a:ea typeface="Courier New" pitchFamily="34" charset="-122"/>
-                <a:cs typeface="Courier New" pitchFamily="34" charset="-120"/>
-              </a:rPr>
-              <a:t>airport_from_id</a:t>
+                  <a:srgbClr val="569CD6"/>
+                </a:solidFill>
+                <a:latin typeface="Courier New" pitchFamily="34" charset="0"/>
+                <a:ea typeface="Courier New" pitchFamily="34" charset="-122"/>
+                <a:cs typeface="Courier New" pitchFamily="34" charset="-120"/>
+              </a:rPr>
+              <a:t>TYPES</a:t>
+            </a:r>
+            <a:r>
+              <a:rPr lang="en-US" sz="1050" dirty="0">
+                <a:solidFill>
+                  <a:srgbClr val="CCCCCC"/>
+                </a:solidFill>
+                <a:latin typeface="Courier New" pitchFamily="34" charset="0"/>
+                <a:ea typeface="Courier New" pitchFamily="34" charset="-122"/>
+                <a:cs typeface="Courier New" pitchFamily="34" charset="-120"/>
+              </a:rPr>
+              <a:t>:</a:t>
             </a:r>
             <a:r>
               <a:rPr lang="en-US" sz="1050" dirty="0">
@@ -11678,7 +11801,7 @@
                 <a:ea typeface="Courier New" pitchFamily="34" charset="-122"/>
                 <a:cs typeface="Courier New" pitchFamily="34" charset="-120"/>
               </a:rPr>
-              <a:t>TYPE</a:t>
+              <a:t>BEGIN</a:t>
             </a:r>
             <a:r>
               <a:rPr lang="en-US" sz="1050" dirty="0">
@@ -11694,13 +11817,35 @@
             <a:r>
               <a:rPr lang="en-US" sz="1050" dirty="0">
                 <a:solidFill>
-                  <a:srgbClr val="4EC9B0"/>
-                </a:solidFill>
-                <a:latin typeface="Courier New" pitchFamily="34" charset="0"/>
-                <a:ea typeface="Courier New" pitchFamily="34" charset="-122"/>
-                <a:cs typeface="Courier New" pitchFamily="34" charset="-120"/>
-              </a:rPr>
-              <a:t>/dmo/airport_from_id</a:t>
+                  <a:srgbClr val="569CD6"/>
+                </a:solidFill>
+                <a:latin typeface="Courier New" pitchFamily="34" charset="0"/>
+                <a:ea typeface="Courier New" pitchFamily="34" charset="-122"/>
+                <a:cs typeface="Courier New" pitchFamily="34" charset="-120"/>
+              </a:rPr>
+              <a:t>OF</a:t>
+            </a:r>
+            <a:r>
+              <a:rPr lang="en-US" sz="1050" dirty="0">
+                <a:solidFill>
+                  <a:srgbClr val="CCCCCC"/>
+                </a:solidFill>
+                <a:latin typeface="Courier New" pitchFamily="34" charset="0"/>
+                <a:ea typeface="Courier New" pitchFamily="34" charset="-122"/>
+                <a:cs typeface="Courier New" pitchFamily="34" charset="-120"/>
+              </a:rPr>
+              <a:t> </a:t>
+            </a:r>
+            <a:r>
+              <a:rPr lang="en-US" sz="1050" dirty="0">
+                <a:solidFill>
+                  <a:srgbClr val="CCCCCC"/>
+                </a:solidFill>
+                <a:latin typeface="Courier New" pitchFamily="34" charset="0"/>
+                <a:ea typeface="Courier New" pitchFamily="34" charset="-122"/>
+                <a:cs typeface="Courier New" pitchFamily="34" charset="-120"/>
+              </a:rPr>
+              <a:t>ty_resultado</a:t>
             </a:r>
             <a:r>
               <a:rPr lang="en-US" sz="1050" dirty="0">
@@ -11742,18 +11887,18 @@
                 <a:ea typeface="Courier New" pitchFamily="34" charset="-122"/>
                 <a:cs typeface="Courier New" pitchFamily="34" charset="-120"/>
               </a:rPr>
-              <a:t>airport_to_id</a:t>
-            </a:r>
-            <a:r>
-              <a:rPr lang="en-US" sz="1050" dirty="0">
-                <a:solidFill>
-                  <a:srgbClr val="CCCCCC"/>
-                </a:solidFill>
-                <a:latin typeface="Courier New" pitchFamily="34" charset="0"/>
-                <a:ea typeface="Courier New" pitchFamily="34" charset="-122"/>
-                <a:cs typeface="Courier New" pitchFamily="34" charset="-120"/>
-              </a:rPr>
-              <a:t>   </a:t>
+              <a:t>valido</a:t>
+            </a:r>
+            <a:r>
+              <a:rPr lang="en-US" sz="1050" dirty="0">
+                <a:solidFill>
+                  <a:srgbClr val="CCCCCC"/>
+                </a:solidFill>
+                <a:latin typeface="Courier New" pitchFamily="34" charset="0"/>
+                <a:ea typeface="Courier New" pitchFamily="34" charset="-122"/>
+                <a:cs typeface="Courier New" pitchFamily="34" charset="-120"/>
+              </a:rPr>
+              <a:t>       </a:t>
             </a:r>
             <a:r>
               <a:rPr lang="en-US" sz="1050" dirty="0">
@@ -11780,13 +11925,13 @@
             <a:r>
               <a:rPr lang="en-US" sz="1050" dirty="0">
                 <a:solidFill>
-                  <a:srgbClr val="4EC9B0"/>
-                </a:solidFill>
-                <a:latin typeface="Courier New" pitchFamily="34" charset="0"/>
-                <a:ea typeface="Courier New" pitchFamily="34" charset="-122"/>
-                <a:cs typeface="Courier New" pitchFamily="34" charset="-120"/>
-              </a:rPr>
-              <a:t>/dmo/airport_to_id</a:t>
+                  <a:srgbClr val="CCCCCC"/>
+                </a:solidFill>
+                <a:latin typeface="Courier New" pitchFamily="34" charset="0"/>
+                <a:ea typeface="Courier New" pitchFamily="34" charset="-122"/>
+                <a:cs typeface="Courier New" pitchFamily="34" charset="-120"/>
+              </a:rPr>
+              <a:t>abap_boolean</a:t>
             </a:r>
             <a:r>
               <a:rPr lang="en-US" sz="1050" dirty="0">
@@ -11828,18 +11973,18 @@
                 <a:ea typeface="Courier New" pitchFamily="34" charset="-122"/>
                 <a:cs typeface="Courier New" pitchFamily="34" charset="-120"/>
               </a:rPr>
-              <a:t>message</a:t>
-            </a:r>
-            <a:r>
-              <a:rPr lang="en-US" sz="1050" dirty="0">
-                <a:solidFill>
-                  <a:srgbClr val="CCCCCC"/>
-                </a:solidFill>
-                <a:latin typeface="Courier New" pitchFamily="34" charset="0"/>
-                <a:ea typeface="Courier New" pitchFamily="34" charset="-122"/>
-                <a:cs typeface="Courier New" pitchFamily="34" charset="-120"/>
-              </a:rPr>
-              <a:t>         </a:t>
+              <a:t>indisponivel</a:t>
+            </a:r>
+            <a:r>
+              <a:rPr lang="en-US" sz="1050" dirty="0">
+                <a:solidFill>
+                  <a:srgbClr val="CCCCCC"/>
+                </a:solidFill>
+                <a:latin typeface="Courier New" pitchFamily="34" charset="0"/>
+                <a:ea typeface="Courier New" pitchFamily="34" charset="-122"/>
+                <a:cs typeface="Courier New" pitchFamily="34" charset="-120"/>
+              </a:rPr>
+              <a:t> </a:t>
             </a:r>
             <a:r>
               <a:rPr lang="en-US" sz="1050" dirty="0">
@@ -11872,7 +12017,7 @@
                 <a:ea typeface="Courier New" pitchFamily="34" charset="-122"/>
                 <a:cs typeface="Courier New" pitchFamily="34" charset="-120"/>
               </a:rPr>
-              <a:t>symsg</a:t>
+              <a:t>abap_boolean</a:t>
             </a:r>
             <a:r>
               <a:rPr lang="en-US" sz="1050" dirty="0">
@@ -11903,7 +12048,29 @@
                 <a:ea typeface="Courier New" pitchFamily="34" charset="-122"/>
                 <a:cs typeface="Courier New" pitchFamily="34" charset="-120"/>
               </a:rPr>
-              <a:t>       </a:t>
+              <a:t>         </a:t>
+            </a:r>
+            <a:r>
+              <a:rPr lang="en-US" sz="1050" dirty="0">
+                <a:solidFill>
+                  <a:srgbClr val="CCCCCC"/>
+                </a:solidFill>
+                <a:latin typeface="Courier New" pitchFamily="34" charset="0"/>
+                <a:ea typeface="Courier New" pitchFamily="34" charset="-122"/>
+                <a:cs typeface="Courier New" pitchFamily="34" charset="-120"/>
+              </a:rPr>
+              <a:t>endereco</a:t>
+            </a:r>
+            <a:r>
+              <a:rPr lang="en-US" sz="1050" dirty="0">
+                <a:solidFill>
+                  <a:srgbClr val="CCCCCC"/>
+                </a:solidFill>
+                <a:latin typeface="Courier New" pitchFamily="34" charset="0"/>
+                <a:ea typeface="Courier New" pitchFamily="34" charset="-122"/>
+                <a:cs typeface="Courier New" pitchFamily="34" charset="-120"/>
+              </a:rPr>
+              <a:t>     </a:t>
             </a:r>
             <a:r>
               <a:rPr lang="en-US" sz="1050" dirty="0">
@@ -11914,7 +12081,7 @@
                 <a:ea typeface="Courier New" pitchFamily="34" charset="-122"/>
                 <a:cs typeface="Courier New" pitchFamily="34" charset="-120"/>
               </a:rPr>
-              <a:t>END</a:t>
+              <a:t>TYPE</a:t>
             </a:r>
             <a:r>
               <a:rPr lang="en-US" sz="1050" dirty="0">
@@ -11930,46 +12097,24 @@
             <a:r>
               <a:rPr lang="en-US" sz="1050" dirty="0">
                 <a:solidFill>
-                  <a:srgbClr val="569CD6"/>
-                </a:solidFill>
-                <a:latin typeface="Courier New" pitchFamily="34" charset="0"/>
-                <a:ea typeface="Courier New" pitchFamily="34" charset="-122"/>
-                <a:cs typeface="Courier New" pitchFamily="34" charset="-120"/>
-              </a:rPr>
-              <a:t>OF</a:t>
-            </a:r>
-            <a:r>
-              <a:rPr lang="en-US" sz="1050" dirty="0">
-                <a:solidFill>
-                  <a:srgbClr val="CCCCCC"/>
-                </a:solidFill>
-                <a:latin typeface="Courier New" pitchFamily="34" charset="0"/>
-                <a:ea typeface="Courier New" pitchFamily="34" charset="-122"/>
-                <a:cs typeface="Courier New" pitchFamily="34" charset="-120"/>
-              </a:rPr>
-              <a:t> </a:t>
-            </a:r>
-            <a:r>
-              <a:rPr lang="en-US" sz="1050" dirty="0">
-                <a:solidFill>
-                  <a:srgbClr val="CCCCCC"/>
-                </a:solidFill>
-                <a:latin typeface="Courier New" pitchFamily="34" charset="0"/>
-                <a:ea typeface="Courier New" pitchFamily="34" charset="-122"/>
-                <a:cs typeface="Courier New" pitchFamily="34" charset="-120"/>
-              </a:rPr>
-              <a:t>st_connection_nested</a:t>
-            </a:r>
-            <a:r>
-              <a:rPr lang="en-US" sz="1050" dirty="0">
-                <a:solidFill>
-                  <a:srgbClr val="CCCCCC"/>
-                </a:solidFill>
-                <a:latin typeface="Courier New" pitchFamily="34" charset="0"/>
-                <a:ea typeface="Courier New" pitchFamily="34" charset="-122"/>
-                <a:cs typeface="Courier New" pitchFamily="34" charset="-120"/>
-              </a:rPr>
-              <a:t>.</a:t>
+                  <a:srgbClr val="CCCCCC"/>
+                </a:solidFill>
+                <a:latin typeface="Courier New" pitchFamily="34" charset="0"/>
+                <a:ea typeface="Courier New" pitchFamily="34" charset="-122"/>
+                <a:cs typeface="Courier New" pitchFamily="34" charset="-120"/>
+              </a:rPr>
+              <a:t>ty_endereco</a:t>
+            </a:r>
+            <a:r>
+              <a:rPr lang="en-US" sz="1050" dirty="0">
+                <a:solidFill>
+                  <a:srgbClr val="CCCCCC"/>
+                </a:solidFill>
+                <a:latin typeface="Courier New" pitchFamily="34" charset="0"/>
+                <a:ea typeface="Courier New" pitchFamily="34" charset="-122"/>
+                <a:cs typeface="Courier New" pitchFamily="34" charset="-120"/>
+              </a:rPr>
+              <a:t>,</a:t>
             </a:r>
             <a:endParaRPr lang="en-US" sz="1050" dirty="0"/>
           </a:p>
@@ -11983,13 +12128,79 @@
             <a:r>
               <a:rPr lang="en-US" sz="1050" dirty="0">
                 <a:solidFill>
-                  <a:srgbClr val="000000"/>
+                  <a:srgbClr val="CCCCCC"/>
+                </a:solidFill>
+                <a:latin typeface="Courier New" pitchFamily="34" charset="0"/>
+                <a:ea typeface="Courier New" pitchFamily="34" charset="-122"/>
+                <a:cs typeface="Courier New" pitchFamily="34" charset="-120"/>
+              </a:rPr>
+              <a:t>       </a:t>
+            </a:r>
+            <a:r>
+              <a:rPr lang="en-US" sz="1050" dirty="0">
+                <a:solidFill>
+                  <a:srgbClr val="569CD6"/>
+                </a:solidFill>
+                <a:latin typeface="Courier New" pitchFamily="34" charset="0"/>
+                <a:ea typeface="Courier New" pitchFamily="34" charset="-122"/>
+                <a:cs typeface="Courier New" pitchFamily="34" charset="-120"/>
+              </a:rPr>
+              <a:t>END</a:t>
+            </a:r>
+            <a:r>
+              <a:rPr lang="en-US" sz="1050" dirty="0">
+                <a:solidFill>
+                  <a:srgbClr val="CCCCCC"/>
                 </a:solidFill>
                 <a:latin typeface="Courier New" pitchFamily="34" charset="0"/>
                 <a:ea typeface="Courier New" pitchFamily="34" charset="-122"/>
                 <a:cs typeface="Courier New" pitchFamily="34" charset="-120"/>
               </a:rPr>
               <a:t> </a:t>
+            </a:r>
+            <a:r>
+              <a:rPr lang="en-US" sz="1050" dirty="0">
+                <a:solidFill>
+                  <a:srgbClr val="569CD6"/>
+                </a:solidFill>
+                <a:latin typeface="Courier New" pitchFamily="34" charset="0"/>
+                <a:ea typeface="Courier New" pitchFamily="34" charset="-122"/>
+                <a:cs typeface="Courier New" pitchFamily="34" charset="-120"/>
+              </a:rPr>
+              <a:t>OF</a:t>
+            </a:r>
+            <a:r>
+              <a:rPr lang="en-US" sz="1050" dirty="0">
+                <a:solidFill>
+                  <a:srgbClr val="CCCCCC"/>
+                </a:solidFill>
+                <a:latin typeface="Courier New" pitchFamily="34" charset="0"/>
+                <a:ea typeface="Courier New" pitchFamily="34" charset="-122"/>
+                <a:cs typeface="Courier New" pitchFamily="34" charset="-120"/>
+              </a:rPr>
+              <a:t> </a:t>
+            </a:r>
+            <a:r>
+              <a:rPr lang="en-US" sz="1050" dirty="0">
+                <a:solidFill>
+                  <a:srgbClr val="CCCCCC"/>
+                </a:solidFill>
+                <a:latin typeface="Courier New" pitchFamily="34" charset="0"/>
+                <a:ea typeface="Courier New" pitchFamily="34" charset="-122"/>
+                <a:cs typeface="Courier New" pitchFamily="34" charset="-120"/>
+              </a:rPr>
+              <a:t>ty_resultado</a:t>
+            </a:r>
+            <a:r>
+              <a:rPr lang="en-US" sz="1050" dirty="0">
+                <a:solidFill>
+                  <a:srgbClr val="CCCCCC"/>
+                </a:solidFill>
+                <a:latin typeface="Courier New" pitchFamily="34" charset="0"/>
+                <a:ea typeface="Courier New" pitchFamily="34" charset="-122"/>
+                <a:cs typeface="Courier New" pitchFamily="34" charset="-120"/>
+              </a:rPr>
+              <a:t>.</a:t>
             </a:r>
             <a:endParaRPr lang="en-US" sz="1050" dirty="0"/>
           </a:p>
@@ -12003,90 +12214,13 @@
             <a:r>
               <a:rPr lang="en-US" sz="1050" dirty="0">
                 <a:solidFill>
-                  <a:srgbClr val="569CD6"/>
-                </a:solidFill>
-                <a:latin typeface="Courier New" pitchFamily="34" charset="0"/>
-                <a:ea typeface="Courier New" pitchFamily="34" charset="-122"/>
-                <a:cs typeface="Courier New" pitchFamily="34" charset="-120"/>
-              </a:rPr>
-              <a:t>DATA</a:t>
-            </a:r>
-            <a:r>
-              <a:rPr lang="en-US" sz="1050" dirty="0">
-                <a:solidFill>
-                  <a:srgbClr val="CCCCCC"/>
+                  <a:srgbClr val="000000"/>
                 </a:solidFill>
                 <a:latin typeface="Courier New" pitchFamily="34" charset="0"/>
                 <a:ea typeface="Courier New" pitchFamily="34" charset="-122"/>
                 <a:cs typeface="Courier New" pitchFamily="34" charset="-120"/>
               </a:rPr>
               <a:t> </a:t>
-            </a:r>
-            <a:r>
-              <a:rPr lang="en-US" sz="1050" dirty="0">
-                <a:solidFill>
-                  <a:srgbClr val="CCCCCC"/>
-                </a:solidFill>
-                <a:latin typeface="Courier New" pitchFamily="34" charset="0"/>
-                <a:ea typeface="Courier New" pitchFamily="34" charset="-122"/>
-                <a:cs typeface="Courier New" pitchFamily="34" charset="-120"/>
-              </a:rPr>
-              <a:t>connection</a:t>
-            </a:r>
-            <a:r>
-              <a:rPr lang="en-US" sz="1050" dirty="0">
-                <a:solidFill>
-                  <a:srgbClr val="CCCCCC"/>
-                </a:solidFill>
-                <a:latin typeface="Courier New" pitchFamily="34" charset="0"/>
-                <a:ea typeface="Courier New" pitchFamily="34" charset="-122"/>
-                <a:cs typeface="Courier New" pitchFamily="34" charset="-120"/>
-              </a:rPr>
-              <a:t>        </a:t>
-            </a:r>
-            <a:r>
-              <a:rPr lang="en-US" sz="1050" dirty="0">
-                <a:solidFill>
-                  <a:srgbClr val="569CD6"/>
-                </a:solidFill>
-                <a:latin typeface="Courier New" pitchFamily="34" charset="0"/>
-                <a:ea typeface="Courier New" pitchFamily="34" charset="-122"/>
-                <a:cs typeface="Courier New" pitchFamily="34" charset="-120"/>
-              </a:rPr>
-              <a:t>TYPE</a:t>
-            </a:r>
-            <a:r>
-              <a:rPr lang="en-US" sz="1050" dirty="0">
-                <a:solidFill>
-                  <a:srgbClr val="CCCCCC"/>
-                </a:solidFill>
-                <a:latin typeface="Courier New" pitchFamily="34" charset="0"/>
-                <a:ea typeface="Courier New" pitchFamily="34" charset="-122"/>
-                <a:cs typeface="Courier New" pitchFamily="34" charset="-120"/>
-              </a:rPr>
-              <a:t> </a:t>
-            </a:r>
-            <a:r>
-              <a:rPr lang="en-US" sz="1050" dirty="0">
-                <a:solidFill>
-                  <a:srgbClr val="CCCCCC"/>
-                </a:solidFill>
-                <a:latin typeface="Courier New" pitchFamily="34" charset="0"/>
-                <a:ea typeface="Courier New" pitchFamily="34" charset="-122"/>
-                <a:cs typeface="Courier New" pitchFamily="34" charset="-120"/>
-              </a:rPr>
-              <a:t>st_connection</a:t>
-            </a:r>
-            <a:r>
-              <a:rPr lang="en-US" sz="1050" dirty="0">
-                <a:solidFill>
-                  <a:srgbClr val="CCCCCC"/>
-                </a:solidFill>
-                <a:latin typeface="Courier New" pitchFamily="34" charset="0"/>
-                <a:ea typeface="Courier New" pitchFamily="34" charset="-122"/>
-                <a:cs typeface="Courier New" pitchFamily="34" charset="-120"/>
-              </a:rPr>
-              <a:t>.</a:t>
             </a:r>
             <a:endParaRPr lang="en-US" sz="1050" dirty="0"/>
           </a:p>
@@ -12128,7 +12262,29 @@
                 <a:ea typeface="Courier New" pitchFamily="34" charset="-122"/>
                 <a:cs typeface="Courier New" pitchFamily="34" charset="-120"/>
               </a:rPr>
-              <a:t>connection_nested</a:t>
+              <a:t>endereco</a:t>
+            </a:r>
+            <a:r>
+              <a:rPr lang="en-US" sz="1050" dirty="0">
+                <a:solidFill>
+                  <a:srgbClr val="CCCCCC"/>
+                </a:solidFill>
+                <a:latin typeface="Courier New" pitchFamily="34" charset="0"/>
+                <a:ea typeface="Courier New" pitchFamily="34" charset="-122"/>
+                <a:cs typeface="Courier New" pitchFamily="34" charset="-120"/>
+              </a:rPr>
+              <a:t>  </a:t>
+            </a:r>
+            <a:r>
+              <a:rPr lang="en-US" sz="1050" dirty="0">
+                <a:solidFill>
+                  <a:srgbClr val="569CD6"/>
+                </a:solidFill>
+                <a:latin typeface="Courier New" pitchFamily="34" charset="0"/>
+                <a:ea typeface="Courier New" pitchFamily="34" charset="-122"/>
+                <a:cs typeface="Courier New" pitchFamily="34" charset="-120"/>
+              </a:rPr>
+              <a:t>TYPE</a:t>
             </a:r>
             <a:r>
               <a:rPr lang="en-US" sz="1050" dirty="0">
@@ -12144,35 +12300,13 @@
             <a:r>
               <a:rPr lang="en-US" sz="1050" dirty="0">
                 <a:solidFill>
-                  <a:srgbClr val="569CD6"/>
-                </a:solidFill>
-                <a:latin typeface="Courier New" pitchFamily="34" charset="0"/>
-                <a:ea typeface="Courier New" pitchFamily="34" charset="-122"/>
-                <a:cs typeface="Courier New" pitchFamily="34" charset="-120"/>
-              </a:rPr>
-              <a:t>TYPE</a:t>
-            </a:r>
-            <a:r>
-              <a:rPr lang="en-US" sz="1050" dirty="0">
-                <a:solidFill>
-                  <a:srgbClr val="CCCCCC"/>
-                </a:solidFill>
-                <a:latin typeface="Courier New" pitchFamily="34" charset="0"/>
-                <a:ea typeface="Courier New" pitchFamily="34" charset="-122"/>
-                <a:cs typeface="Courier New" pitchFamily="34" charset="-120"/>
-              </a:rPr>
-              <a:t> </a:t>
-            </a:r>
-            <a:r>
-              <a:rPr lang="en-US" sz="1050" dirty="0">
-                <a:solidFill>
-                  <a:srgbClr val="CCCCCC"/>
-                </a:solidFill>
-                <a:latin typeface="Courier New" pitchFamily="34" charset="0"/>
-                <a:ea typeface="Courier New" pitchFamily="34" charset="-122"/>
-                <a:cs typeface="Courier New" pitchFamily="34" charset="-120"/>
-              </a:rPr>
-              <a:t>st_connection_nested</a:t>
+                  <a:srgbClr val="CCCCCC"/>
+                </a:solidFill>
+                <a:latin typeface="Courier New" pitchFamily="34" charset="0"/>
+                <a:ea typeface="Courier New" pitchFamily="34" charset="-122"/>
+                <a:cs typeface="Courier New" pitchFamily="34" charset="-120"/>
+              </a:rPr>
+              <a:t>ty_endereco</a:t>
             </a:r>
             <a:r>
               <a:rPr lang="en-US" sz="1050" dirty="0">
@@ -12225,18 +12359,18 @@
                 <a:ea typeface="Courier New" pitchFamily="34" charset="-122"/>
                 <a:cs typeface="Courier New" pitchFamily="34" charset="-120"/>
               </a:rPr>
-              <a:t>connection_full</a:t>
-            </a:r>
-            <a:r>
-              <a:rPr lang="en-US" sz="1050" dirty="0">
-                <a:solidFill>
-                  <a:srgbClr val="CCCCCC"/>
-                </a:solidFill>
-                <a:latin typeface="Courier New" pitchFamily="34" charset="0"/>
-                <a:ea typeface="Courier New" pitchFamily="34" charset="-122"/>
-                <a:cs typeface="Courier New" pitchFamily="34" charset="-120"/>
-              </a:rPr>
-              <a:t>   </a:t>
+              <a:t>resultado</a:t>
+            </a:r>
+            <a:r>
+              <a:rPr lang="en-US" sz="1050" dirty="0">
+                <a:solidFill>
+                  <a:srgbClr val="CCCCCC"/>
+                </a:solidFill>
+                <a:latin typeface="Courier New" pitchFamily="34" charset="0"/>
+                <a:ea typeface="Courier New" pitchFamily="34" charset="-122"/>
+                <a:cs typeface="Courier New" pitchFamily="34" charset="-120"/>
+              </a:rPr>
+              <a:t> </a:t>
             </a:r>
             <a:r>
               <a:rPr lang="en-US" sz="1050" dirty="0">
@@ -12263,13 +12397,110 @@
             <a:r>
               <a:rPr lang="en-US" sz="1050" dirty="0">
                 <a:solidFill>
-                  <a:srgbClr val="4EC9B0"/>
-                </a:solidFill>
-                <a:latin typeface="Courier New" pitchFamily="34" charset="0"/>
-                <a:ea typeface="Courier New" pitchFamily="34" charset="-122"/>
-                <a:cs typeface="Courier New" pitchFamily="34" charset="-120"/>
-              </a:rPr>
-              <a:t>/DMO/I_Connection</a:t>
+                  <a:srgbClr val="CCCCCC"/>
+                </a:solidFill>
+                <a:latin typeface="Courier New" pitchFamily="34" charset="0"/>
+                <a:ea typeface="Courier New" pitchFamily="34" charset="-122"/>
+                <a:cs typeface="Courier New" pitchFamily="34" charset="-120"/>
+              </a:rPr>
+              <a:t>ty_resultado</a:t>
+            </a:r>
+            <a:r>
+              <a:rPr lang="en-US" sz="1050" dirty="0">
+                <a:solidFill>
+                  <a:srgbClr val="CCCCCC"/>
+                </a:solidFill>
+                <a:latin typeface="Courier New" pitchFamily="34" charset="0"/>
+                <a:ea typeface="Courier New" pitchFamily="34" charset="-122"/>
+                <a:cs typeface="Courier New" pitchFamily="34" charset="-120"/>
+              </a:rPr>
+              <a:t>.</a:t>
+            </a:r>
+            <a:endParaRPr lang="en-US" sz="1050" dirty="0"/>
+          </a:p>
+          <a:p>
+            <a:pPr indent="0" marL="0">
+              <a:lnSpc>
+                <a:spcPct val="105000"/>
+              </a:lnSpc>
+              <a:buNone/>
+            </a:pPr>
+            <a:r>
+              <a:rPr lang="en-US" sz="1050" dirty="0">
+                <a:solidFill>
+                  <a:srgbClr val="569CD6"/>
+                </a:solidFill>
+                <a:latin typeface="Courier New" pitchFamily="34" charset="0"/>
+                <a:ea typeface="Courier New" pitchFamily="34" charset="-122"/>
+                <a:cs typeface="Courier New" pitchFamily="34" charset="-120"/>
+              </a:rPr>
+              <a:t>DATA</a:t>
+            </a:r>
+            <a:r>
+              <a:rPr lang="en-US" sz="1050" dirty="0">
+                <a:solidFill>
+                  <a:srgbClr val="CCCCCC"/>
+                </a:solidFill>
+                <a:latin typeface="Courier New" pitchFamily="34" charset="0"/>
+                <a:ea typeface="Courier New" pitchFamily="34" charset="-122"/>
+                <a:cs typeface="Courier New" pitchFamily="34" charset="-120"/>
+              </a:rPr>
+              <a:t> </a:t>
+            </a:r>
+            <a:r>
+              <a:rPr lang="en-US" sz="1050" dirty="0">
+                <a:solidFill>
+                  <a:srgbClr val="CCCCCC"/>
+                </a:solidFill>
+                <a:latin typeface="Courier New" pitchFamily="34" charset="0"/>
+                <a:ea typeface="Courier New" pitchFamily="34" charset="-122"/>
+                <a:cs typeface="Courier New" pitchFamily="34" charset="-120"/>
+              </a:rPr>
+              <a:t>linha</a:t>
+            </a:r>
+            <a:r>
+              <a:rPr lang="en-US" sz="1050" dirty="0">
+                <a:solidFill>
+                  <a:srgbClr val="CCCCCC"/>
+                </a:solidFill>
+                <a:latin typeface="Courier New" pitchFamily="34" charset="0"/>
+                <a:ea typeface="Courier New" pitchFamily="34" charset="-122"/>
+                <a:cs typeface="Courier New" pitchFamily="34" charset="-120"/>
+              </a:rPr>
+              <a:t>     </a:t>
+            </a:r>
+            <a:r>
+              <a:rPr lang="en-US" sz="1050" dirty="0">
+                <a:solidFill>
+                  <a:srgbClr val="569CD6"/>
+                </a:solidFill>
+                <a:latin typeface="Courier New" pitchFamily="34" charset="0"/>
+                <a:ea typeface="Courier New" pitchFamily="34" charset="-122"/>
+                <a:cs typeface="Courier New" pitchFamily="34" charset="-120"/>
+              </a:rPr>
+              <a:t>TYPE</a:t>
+            </a:r>
+            <a:r>
+              <a:rPr lang="en-US" sz="1050" dirty="0">
+                <a:solidFill>
+                  <a:srgbClr val="CCCCCC"/>
+                </a:solidFill>
+                <a:latin typeface="Courier New" pitchFamily="34" charset="0"/>
+                <a:ea typeface="Courier New" pitchFamily="34" charset="-122"/>
+                <a:cs typeface="Courier New" pitchFamily="34" charset="-120"/>
+              </a:rPr>
+              <a:t> </a:t>
+            </a:r>
+            <a:r>
+              <a:rPr lang="en-US" sz="1050" dirty="0">
+                <a:solidFill>
+                  <a:srgbClr val="CCCCCC"/>
+                </a:solidFill>
+                <a:latin typeface="Courier New" pitchFamily="34" charset="0"/>
+                <a:ea typeface="Courier New" pitchFamily="34" charset="-122"/>
+                <a:cs typeface="Courier New" pitchFamily="34" charset="-120"/>
+              </a:rPr>
+              <a:t>zr_pc_endereco</a:t>
             </a:r>
             <a:r>
               <a:rPr lang="en-US" sz="1050" dirty="0">
@@ -12658,7 +12889,7 @@
                 <a:ea typeface="Courier New" pitchFamily="34" charset="-122"/>
                 <a:cs typeface="Courier New" pitchFamily="34" charset="-120"/>
               </a:rPr>
-              <a:t>message TYPE symsg</a:t>
+              <a:t>endereco TYPE ty_endereco</a:t>
             </a:r>
             <a:r>
               <a:rPr lang="en-US" sz="1050" dirty="0">
@@ -13191,7 +13422,7 @@
                           <a:ea typeface="Courier New" pitchFamily="34" charset="-122"/>
                           <a:cs typeface="Courier New" pitchFamily="34" charset="-120"/>
                         </a:rPr>
-                        <a:t>st_connection</a:t>
+                        <a:t>ty_endereco</a:t>
                       </a:r>
                       <a:endParaRPr lang="en-US" sz="1200" dirty="0"/>
                     </a:p>
@@ -13234,7 +13465,7 @@
                             <a:srgbClr val="1D2D3E"/>
                           </a:solidFill>
                         </a:rPr>
-                        <a:t>Tipo usado só por uma classe ou método</a:t>
+                        <a:t>Tipo usado só por uma classe ou interface</a:t>
                       </a:r>
                       <a:endParaRPr lang="en-US" sz="1200" dirty="0"/>
                     </a:p>
@@ -13486,7 +13717,7 @@
                           <a:ea typeface="Courier New" pitchFamily="34" charset="-122"/>
                           <a:cs typeface="Courier New" pitchFamily="34" charset="-120"/>
                         </a:rPr>
-                        <a:t>TYPE /dmo/connection</a:t>
+                        <a:t>TYPE zta_pc_endereco</a:t>
                       </a:r>
                       <a:endParaRPr lang="en-US" sz="1200" dirty="0"/>
                     </a:p>
@@ -13620,7 +13851,7 @@
                           <a:ea typeface="Courier New" pitchFamily="34" charset="-122"/>
                           <a:cs typeface="Courier New" pitchFamily="34" charset="-120"/>
                         </a:rPr>
-                        <a:t>TYPE /DMO/I_Connection</a:t>
+                        <a:t>TYPE zr_pc_endereco</a:t>
                       </a:r>
                       <a:endParaRPr lang="en-US" sz="1200" dirty="0"/>
                     </a:p>
@@ -14494,7 +14725,7 @@
         <p:spPr>
           <a:xfrm>
             <a:off x="640080" y="1700784"/>
-            <a:ext cx="2153412" cy="292608"/>
+            <a:ext cx="2697480" cy="292608"/>
           </a:xfrm>
           <a:prstGeom prst="rect">
             <a:avLst/>
@@ -14514,7 +14745,7 @@
         <p:spPr>
           <a:xfrm>
             <a:off x="640080" y="1700784"/>
-            <a:ext cx="2153412" cy="27432"/>
+            <a:ext cx="2697480" cy="27432"/>
           </a:xfrm>
           <a:prstGeom prst="rect">
             <a:avLst/>
@@ -14534,7 +14765,7 @@
         <p:spPr>
           <a:xfrm>
             <a:off x="731520" y="1719072"/>
-            <a:ext cx="1970532" cy="274320"/>
+            <a:ext cx="2514600" cy="274320"/>
           </a:xfrm>
           <a:prstGeom prst="rect">
             <a:avLst/>
@@ -14555,7 +14786,7 @@
                   <a:srgbClr val="FFFFFF"/>
                 </a:solidFill>
               </a:rPr>
-              <a:t>zcl_05_struct.clas.abap</a:t>
+              <a:t>zcl_pc_endereco_demo.clas.abap</a:t>
             </a:r>
             <a:endParaRPr lang="en-US" sz="950" dirty="0"/>
           </a:p>
@@ -14591,7 +14822,7 @@
                   <a:srgbClr val="9DA5B4"/>
                 </a:solidFill>
               </a:rPr>
-              <a:t>ZS4D400_## › ZCL_05_STRUCT › main</a:t>
+              <a:t>Exemplo sobre ZAVBS_PC_CLIENTES › main</a:t>
             </a:r>
             <a:endParaRPr lang="en-US" sz="850" dirty="0"/>
           </a:p>
@@ -14915,7 +15146,7 @@
                 <a:ea typeface="Courier New" pitchFamily="34" charset="-122"/>
                 <a:cs typeface="Courier New" pitchFamily="34" charset="-120"/>
               </a:rPr>
-              <a:t>connection-airport_from_id</a:t>
+              <a:t>endereco-uf</a:t>
             </a:r>
             <a:r>
               <a:rPr lang="en-US" sz="1050" dirty="0">
@@ -14959,7 +15190,7 @@
                 <a:ea typeface="Courier New" pitchFamily="34" charset="-122"/>
                 <a:cs typeface="Courier New" pitchFamily="34" charset="-120"/>
               </a:rPr>
-              <a:t>'FRA'</a:t>
+              <a:t>'SP'</a:t>
             </a:r>
             <a:r>
               <a:rPr lang="en-US" sz="1050" dirty="0">
@@ -14990,7 +15221,7 @@
                 <a:ea typeface="Courier New" pitchFamily="34" charset="-122"/>
                 <a:cs typeface="Courier New" pitchFamily="34" charset="-120"/>
               </a:rPr>
-              <a:t>connection_nested-message-msgty</a:t>
+              <a:t>resultado-endereco-localidade</a:t>
             </a:r>
             <a:r>
               <a:rPr lang="en-US" sz="1050" dirty="0">
@@ -15034,7 +15265,7 @@
                 <a:ea typeface="Courier New" pitchFamily="34" charset="-122"/>
                 <a:cs typeface="Courier New" pitchFamily="34" charset="-120"/>
               </a:rPr>
-              <a:t>'E'</a:t>
+              <a:t>'São Paulo'</a:t>
             </a:r>
             <a:r>
               <a:rPr lang="en-US" sz="1050" dirty="0">
@@ -15085,7 +15316,7 @@
                 <a:ea typeface="Courier New" pitchFamily="34" charset="-122"/>
                 <a:cs typeface="Courier New" pitchFamily="34" charset="-120"/>
               </a:rPr>
-              <a:t>connection</a:t>
+              <a:t>endereco</a:t>
             </a:r>
             <a:r>
               <a:rPr lang="en-US" sz="1050" dirty="0">
@@ -15184,7 +15415,29 @@
                 <a:ea typeface="Courier New" pitchFamily="34" charset="-122"/>
                 <a:cs typeface="Courier New" pitchFamily="34" charset="-120"/>
               </a:rPr>
-              <a:t>airport_from_id</a:t>
+              <a:t>cep</a:t>
+            </a:r>
+            <a:r>
+              <a:rPr lang="en-US" sz="1050" dirty="0">
+                <a:solidFill>
+                  <a:srgbClr val="CCCCCC"/>
+                </a:solidFill>
+                <a:latin typeface="Courier New" pitchFamily="34" charset="0"/>
+                <a:ea typeface="Courier New" pitchFamily="34" charset="-122"/>
+                <a:cs typeface="Courier New" pitchFamily="34" charset="-120"/>
+              </a:rPr>
+              <a:t>        </a:t>
+            </a:r>
+            <a:r>
+              <a:rPr lang="en-US" sz="1050" dirty="0">
+                <a:solidFill>
+                  <a:srgbClr val="CCCCCC"/>
+                </a:solidFill>
+                <a:latin typeface="Courier New" pitchFamily="34" charset="0"/>
+                <a:ea typeface="Courier New" pitchFamily="34" charset="-122"/>
+                <a:cs typeface="Courier New" pitchFamily="34" charset="-120"/>
+              </a:rPr>
+              <a:t>=</a:t>
             </a:r>
             <a:r>
               <a:rPr lang="en-US" sz="1050" dirty="0">
@@ -15200,35 +15453,13 @@
             <a:r>
               <a:rPr lang="en-US" sz="1050" dirty="0">
                 <a:solidFill>
-                  <a:srgbClr val="CCCCCC"/>
-                </a:solidFill>
-                <a:latin typeface="Courier New" pitchFamily="34" charset="0"/>
-                <a:ea typeface="Courier New" pitchFamily="34" charset="-122"/>
-                <a:cs typeface="Courier New" pitchFamily="34" charset="-120"/>
-              </a:rPr>
-              <a:t>=</a:t>
-            </a:r>
-            <a:r>
-              <a:rPr lang="en-US" sz="1050" dirty="0">
-                <a:solidFill>
-                  <a:srgbClr val="CCCCCC"/>
-                </a:solidFill>
-                <a:latin typeface="Courier New" pitchFamily="34" charset="0"/>
-                <a:ea typeface="Courier New" pitchFamily="34" charset="-122"/>
-                <a:cs typeface="Courier New" pitchFamily="34" charset="-120"/>
-              </a:rPr>
-              <a:t> </a:t>
-            </a:r>
-            <a:r>
-              <a:rPr lang="en-US" sz="1050" dirty="0">
-                <a:solidFill>
                   <a:srgbClr val="CE9178"/>
                 </a:solidFill>
                 <a:latin typeface="Courier New" pitchFamily="34" charset="0"/>
                 <a:ea typeface="Courier New" pitchFamily="34" charset="-122"/>
                 <a:cs typeface="Courier New" pitchFamily="34" charset="-120"/>
               </a:rPr>
-              <a:t>'FRA'</a:t>
+              <a:t>'01310100'</a:t>
             </a:r>
             <a:endParaRPr lang="en-US" sz="1050" dirty="0"/>
           </a:p>
@@ -15248,29 +15479,29 @@
                 <a:ea typeface="Courier New" pitchFamily="34" charset="-122"/>
                 <a:cs typeface="Courier New" pitchFamily="34" charset="-120"/>
               </a:rPr>
-              <a:t>                      </a:t>
-            </a:r>
-            <a:r>
-              <a:rPr lang="en-US" sz="1050" dirty="0">
-                <a:solidFill>
-                  <a:srgbClr val="CCCCCC"/>
-                </a:solidFill>
-                <a:latin typeface="Courier New" pitchFamily="34" charset="0"/>
-                <a:ea typeface="Courier New" pitchFamily="34" charset="-122"/>
-                <a:cs typeface="Courier New" pitchFamily="34" charset="-120"/>
-              </a:rPr>
-              <a:t>airport_to_id</a:t>
-            </a:r>
-            <a:r>
-              <a:rPr lang="en-US" sz="1050" dirty="0">
-                <a:solidFill>
-                  <a:srgbClr val="CCCCCC"/>
-                </a:solidFill>
-                <a:latin typeface="Courier New" pitchFamily="34" charset="0"/>
-                <a:ea typeface="Courier New" pitchFamily="34" charset="-122"/>
-                <a:cs typeface="Courier New" pitchFamily="34" charset="-120"/>
-              </a:rPr>
-              <a:t>   </a:t>
+              <a:t>                    </a:t>
+            </a:r>
+            <a:r>
+              <a:rPr lang="en-US" sz="1050" dirty="0">
+                <a:solidFill>
+                  <a:srgbClr val="CCCCCC"/>
+                </a:solidFill>
+                <a:latin typeface="Courier New" pitchFamily="34" charset="0"/>
+                <a:ea typeface="Courier New" pitchFamily="34" charset="-122"/>
+                <a:cs typeface="Courier New" pitchFamily="34" charset="-120"/>
+              </a:rPr>
+              <a:t>logradouro</a:t>
+            </a:r>
+            <a:r>
+              <a:rPr lang="en-US" sz="1050" dirty="0">
+                <a:solidFill>
+                  <a:srgbClr val="CCCCCC"/>
+                </a:solidFill>
+                <a:latin typeface="Courier New" pitchFamily="34" charset="0"/>
+                <a:ea typeface="Courier New" pitchFamily="34" charset="-122"/>
+                <a:cs typeface="Courier New" pitchFamily="34" charset="-120"/>
+              </a:rPr>
+              <a:t> </a:t>
             </a:r>
             <a:r>
               <a:rPr lang="en-US" sz="1050" dirty="0">
@@ -15303,7 +15534,7 @@
                 <a:ea typeface="Courier New" pitchFamily="34" charset="-122"/>
                 <a:cs typeface="Courier New" pitchFamily="34" charset="-120"/>
               </a:rPr>
-              <a:t>'JFK'</a:t>
+              <a:t>'Avenida Paulista'</a:t>
             </a:r>
             <a:endParaRPr lang="en-US" sz="1050" dirty="0"/>
           </a:p>
@@ -15323,29 +15554,29 @@
                 <a:ea typeface="Courier New" pitchFamily="34" charset="-122"/>
                 <a:cs typeface="Courier New" pitchFamily="34" charset="-120"/>
               </a:rPr>
-              <a:t>                      </a:t>
-            </a:r>
-            <a:r>
-              <a:rPr lang="en-US" sz="1050" dirty="0">
-                <a:solidFill>
-                  <a:srgbClr val="CCCCCC"/>
-                </a:solidFill>
-                <a:latin typeface="Courier New" pitchFamily="34" charset="0"/>
-                <a:ea typeface="Courier New" pitchFamily="34" charset="-122"/>
-                <a:cs typeface="Courier New" pitchFamily="34" charset="-120"/>
-              </a:rPr>
-              <a:t>carrier_name</a:t>
-            </a:r>
-            <a:r>
-              <a:rPr lang="en-US" sz="1050" dirty="0">
-                <a:solidFill>
-                  <a:srgbClr val="CCCCCC"/>
-                </a:solidFill>
-                <a:latin typeface="Courier New" pitchFamily="34" charset="0"/>
-                <a:ea typeface="Courier New" pitchFamily="34" charset="-122"/>
-                <a:cs typeface="Courier New" pitchFamily="34" charset="-120"/>
-              </a:rPr>
-              <a:t>    </a:t>
+              <a:t>                    </a:t>
+            </a:r>
+            <a:r>
+              <a:rPr lang="en-US" sz="1050" dirty="0">
+                <a:solidFill>
+                  <a:srgbClr val="CCCCCC"/>
+                </a:solidFill>
+                <a:latin typeface="Courier New" pitchFamily="34" charset="0"/>
+                <a:ea typeface="Courier New" pitchFamily="34" charset="-122"/>
+                <a:cs typeface="Courier New" pitchFamily="34" charset="-120"/>
+              </a:rPr>
+              <a:t>uf</a:t>
+            </a:r>
+            <a:r>
+              <a:rPr lang="en-US" sz="1050" dirty="0">
+                <a:solidFill>
+                  <a:srgbClr val="CCCCCC"/>
+                </a:solidFill>
+                <a:latin typeface="Courier New" pitchFamily="34" charset="0"/>
+                <a:ea typeface="Courier New" pitchFamily="34" charset="-122"/>
+                <a:cs typeface="Courier New" pitchFamily="34" charset="-120"/>
+              </a:rPr>
+              <a:t>         </a:t>
             </a:r>
             <a:r>
               <a:rPr lang="en-US" sz="1050" dirty="0">
@@ -15378,7 +15609,7 @@
                 <a:ea typeface="Courier New" pitchFamily="34" charset="-122"/>
                 <a:cs typeface="Courier New" pitchFamily="34" charset="-120"/>
               </a:rPr>
-              <a:t>'Lufthansa'</a:t>
+              <a:t>'SP'</a:t>
             </a:r>
             <a:r>
               <a:rPr lang="en-US" sz="1050" dirty="0">
@@ -15451,7 +15682,7 @@
                 <a:ea typeface="Courier New" pitchFamily="34" charset="-122"/>
                 <a:cs typeface="Courier New" pitchFamily="34" charset="-120"/>
               </a:rPr>
-              <a:t>connection</a:t>
+              <a:t>endereco</a:t>
             </a:r>
             <a:r>
               <a:rPr lang="en-US" sz="1050" dirty="0">
@@ -15683,13 +15914,13 @@
             <a:r>
               <a:rPr lang="en-US" sz="1050" dirty="0">
                 <a:solidFill>
-                  <a:srgbClr val="4EC9B0"/>
-                </a:solidFill>
-                <a:latin typeface="Courier New" pitchFamily="34" charset="0"/>
-                <a:ea typeface="Courier New" pitchFamily="34" charset="-122"/>
-                <a:cs typeface="Courier New" pitchFamily="34" charset="-120"/>
-              </a:rPr>
-              <a:t>/DMO/I_Connection</a:t>
+                  <a:srgbClr val="CCCCCC"/>
+                </a:solidFill>
+                <a:latin typeface="Courier New" pitchFamily="34" charset="0"/>
+                <a:ea typeface="Courier New" pitchFamily="34" charset="-122"/>
+                <a:cs typeface="Courier New" pitchFamily="34" charset="-120"/>
+              </a:rPr>
+              <a:t>zr_pc_endereco</a:t>
             </a:r>
             <a:endParaRPr lang="en-US" sz="1050" dirty="0"/>
           </a:p>
@@ -15795,7 +16026,7 @@
                 <a:ea typeface="Courier New" pitchFamily="34" charset="-122"/>
                 <a:cs typeface="Courier New" pitchFamily="34" charset="-120"/>
               </a:rPr>
-              <a:t>AirlineID</a:t>
+              <a:t>ClienteUUID</a:t>
             </a:r>
             <a:r>
               <a:rPr lang="en-US" sz="1050" dirty="0">
@@ -15833,13 +16064,24 @@
             <a:r>
               <a:rPr lang="en-US" sz="1050" dirty="0">
                 <a:solidFill>
-                  <a:srgbClr val="CE9178"/>
-                </a:solidFill>
-                <a:latin typeface="Courier New" pitchFamily="34" charset="0"/>
-                <a:ea typeface="Courier New" pitchFamily="34" charset="-122"/>
-                <a:cs typeface="Courier New" pitchFamily="34" charset="-120"/>
-              </a:rPr>
-              <a:t>'LH'</a:t>
+                  <a:srgbClr val="CCCCCC"/>
+                </a:solidFill>
+                <a:latin typeface="Courier New" pitchFamily="34" charset="0"/>
+                <a:ea typeface="Courier New" pitchFamily="34" charset="-122"/>
+                <a:cs typeface="Courier New" pitchFamily="34" charset="-120"/>
+              </a:rPr>
+              <a:t>@</a:t>
+            </a:r>
+            <a:r>
+              <a:rPr lang="en-US" sz="1050" dirty="0">
+                <a:solidFill>
+                  <a:srgbClr val="CCCCCC"/>
+                </a:solidFill>
+                <a:latin typeface="Courier New" pitchFamily="34" charset="0"/>
+                <a:ea typeface="Courier New" pitchFamily="34" charset="-122"/>
+                <a:cs typeface="Courier New" pitchFamily="34" charset="-120"/>
+              </a:rPr>
+              <a:t>cliente</a:t>
             </a:r>
             <a:r>
               <a:rPr lang="en-US" sz="1050" dirty="0">
@@ -15883,7 +16125,7 @@
                 <a:ea typeface="Courier New" pitchFamily="34" charset="-122"/>
                 <a:cs typeface="Courier New" pitchFamily="34" charset="-120"/>
               </a:rPr>
-              <a:t>ConnectionID</a:t>
+              <a:t>EnderecoPrincipal</a:t>
             </a:r>
             <a:r>
               <a:rPr lang="en-US" sz="1050" dirty="0">
@@ -15921,13 +16163,24 @@
             <a:r>
               <a:rPr lang="en-US" sz="1050" dirty="0">
                 <a:solidFill>
-                  <a:srgbClr val="CE9178"/>
-                </a:solidFill>
-                <a:latin typeface="Courier New" pitchFamily="34" charset="0"/>
-                <a:ea typeface="Courier New" pitchFamily="34" charset="-122"/>
-                <a:cs typeface="Courier New" pitchFamily="34" charset="-120"/>
-              </a:rPr>
-              <a:t>'0400'</a:t>
+                  <a:srgbClr val="CCCCCC"/>
+                </a:solidFill>
+                <a:latin typeface="Courier New" pitchFamily="34" charset="0"/>
+                <a:ea typeface="Courier New" pitchFamily="34" charset="-122"/>
+                <a:cs typeface="Courier New" pitchFamily="34" charset="-120"/>
+              </a:rPr>
+              <a:t>@</a:t>
+            </a:r>
+            <a:r>
+              <a:rPr lang="en-US" sz="1050" dirty="0">
+                <a:solidFill>
+                  <a:srgbClr val="CCCCCC"/>
+                </a:solidFill>
+                <a:latin typeface="Courier New" pitchFamily="34" charset="0"/>
+                <a:ea typeface="Courier New" pitchFamily="34" charset="-122"/>
+                <a:cs typeface="Courier New" pitchFamily="34" charset="-120"/>
+              </a:rPr>
+              <a:t>abap_true</a:t>
             </a:r>
             <a:endParaRPr lang="en-US" sz="1050" dirty="0"/>
           </a:p>
@@ -15991,7 +16244,7 @@
                 <a:ea typeface="Courier New" pitchFamily="34" charset="-122"/>
                 <a:cs typeface="Courier New" pitchFamily="34" charset="-120"/>
               </a:rPr>
-              <a:t>connection_full</a:t>
+              <a:t>linha</a:t>
             </a:r>
             <a:r>
               <a:rPr lang="en-US" sz="1050" dirty="0">
@@ -17171,7 +17424,7 @@
         </p:blipFill>
         <p:spPr>
           <a:xfrm>
-            <a:off x="877824" y="2470595"/>
+            <a:off x="6562192" y="2470595"/>
             <a:ext cx="256032" cy="256032"/>
           </a:xfrm>
           <a:prstGeom prst="rect">
@@ -17195,7 +17448,7 @@
         </p:blipFill>
         <p:spPr>
           <a:xfrm>
-            <a:off x="6562192" y="2470595"/>
+            <a:off x="877824" y="2470595"/>
             <a:ext cx="256032" cy="256032"/>
           </a:xfrm>
           <a:prstGeom prst="rect">
